--- a/lectures/CYBER444_Week03_Windows_Server_Administration.pptx
+++ b/lectures/CYBER444_Week03_Windows_Server_Administration.pptx
@@ -109,6 +109,7 @@
     <p:sldId id="357" r:id="rId109"/>
     <p:sldId id="358" r:id="rId110"/>
     <p:sldId id="359" r:id="rId111"/>
+    <p:sldId id="360" r:id="rId112"/>
   </p:sldIdLst>
   <p:sldSz cx="12191695" cy="6858000" type="screen4x3"/>
   <p:notesSz cx="6858000" cy="9144000"/>
@@ -745,7 +746,7 @@
           <a:lstStyle/>
           <a:p>
             <a:r>
-              <a:t>This connects directly back to Section 04's Task Scheduler slide - detection can and should scale via automation (a nightly scheduled audit run) even when the actual remediation action stays a deliberate, human-reviewed step. Splitting detection from action is the key idea: automate the part that's just noticing, keep a human on the part that's destructive.</a:t>
+              <a:t>A dry-run mode is worth explaining concretely: the script reports what it WOULD do to each account without actually touching anything, so a human can review the plan against the original audit findings before any account is disabled, described, or moved - catching mistakes before they're real instead of after.</a:t>
             </a:r>
           </a:p>
         </p:txBody>
@@ -815,7 +816,7 @@
           <a:lstStyle/>
           <a:p>
             <a:r>
-              <a:t>Idempotent scripting is worth defining plainly: a script that can be run twice on the same account without causing harm the second time (e.g. checking “is this already disabled?” before disabling it again), so a partial run that failed halfway through can simply be re-run from the top rather than requiring careful manual cleanup first. The honest answer to “manual vs. automated”: neither extreme is right - detection scales via automation, but the disable/delete action itself still benefits from a human checkpoint, exactly like the quarantine-OU staging from the previous slide.</a:t>
+              <a:t>This connects directly back to Section 04's Task Scheduler slide - detection can and should scale via automation (a nightly scheduled audit run) even when the actual remediation action stays a deliberate, human-reviewed step. Splitting detection from action is the key idea: automate the part that's just noticing, keep a human on the part that's destructive.</a:t>
             </a:r>
           </a:p>
         </p:txBody>
@@ -885,7 +886,7 @@
           <a:lstStyle/>
           <a:p>
             <a:r>
-              <a:t>Reassure students this is a long exercise but each piece is a direct extension of a slide they just saw this lecture - the DC-verification step mirrors the DC-verification slide, the OU/user creation steps mirror the OU/user slides, the GPO/PSO/verification steps mirror the GPO/PSO/verification slides, and the LDAP/RADIUS step mirrors the LDAP/RADIUS slides. Point that mapping out explicitly so it doesn't feel like new material dropped in cold.</a:t>
+              <a:t>Idempotent scripting is worth defining plainly: a script that can be run twice on the same account without causing harm the second time (e.g. checking “is this already disabled?” before disabling it again), so a partial run that failed halfway through can simply be re-run from the top rather than requiring careful manual cleanup first. The honest answer to “manual vs. automated”: neither extreme is right - detection scales via automation, but the disable/delete action itself still benefits from a human checkpoint, exactly like the quarantine-OU staging from the previous slide.</a:t>
             </a:r>
           </a:p>
         </p:txBody>
@@ -955,7 +956,7 @@
           <a:lstStyle/>
           <a:p>
             <a:r>
-              <a:t>Point out the single heaviest item is now the RADIUS/LDAP work at 27 points - more than a quarter of the total grade in one line item - because it's the newest, most advanced material and the one most likely to need extra help, so budget study time accordingly.</a:t>
+              <a:t>Reassure students this is a long exercise but each piece is a direct extension of a slide they just saw this lecture - the DC-verification step mirrors the DC-verification slide, the OU/user creation steps mirror the OU/user slides, the GPO/PSO/verification steps mirror the GPO/PSO/verification slides, and the LDAP/RADIUS step mirrors the LDAP/RADIUS slides. Point that mapping out explicitly so it doesn't feel like new material dropped in cold.</a:t>
             </a:r>
           </a:p>
         </p:txBody>
@@ -1025,6 +1026,76 @@
           <a:lstStyle/>
           <a:p>
             <a:r>
+              <a:t>Point out the single heaviest item is now the RADIUS/LDAP work at 27 points - more than a quarter of the total grade in one line item - because it's the newest, most advanced material and the one most likely to need extra help, so budget study time accordingly.</a:t>
+            </a:r>
+          </a:p>
+        </p:txBody>
+      </p:sp>
+      <p:sp>
+        <p:nvSpPr>
+          <p:cNvPr id="4" name="Slide Number Placeholder 3"/>
+          <p:cNvSpPr>
+            <a:spLocks noGrp="1"/>
+          </p:cNvSpPr>
+          <p:nvPr>
+            <p:ph type="sldNum" idx="5" sz="quarter"/>
+          </p:nvPr>
+        </p:nvSpPr>
+        <p:spPr/>
+      </p:sp>
+    </p:spTree>
+  </p:cSld>
+  <p:clrMapOvr>
+    <a:masterClrMapping/>
+  </p:clrMapOvr>
+</p:notes>
+</file>
+
+<file path=ppt/notesSlides/notesSlide105.xml><?xml version="1.0" encoding="utf-8"?>
+<p:notes xmlns:a="http://schemas.openxmlformats.org/drawingml/2006/main" xmlns:p="http://schemas.openxmlformats.org/presentationml/2006/main" xmlns:r="http://schemas.openxmlformats.org/officeDocument/2006/relationships">
+  <p:cSld>
+    <p:spTree>
+      <p:nvGrpSpPr>
+        <p:cNvPr id="1" name=""/>
+        <p:cNvGrpSpPr/>
+        <p:nvPr/>
+      </p:nvGrpSpPr>
+      <p:grpSpPr>
+        <a:xfrm>
+          <a:off x="0" y="0"/>
+          <a:ext cx="0" cy="0"/>
+          <a:chOff x="0" y="0"/>
+          <a:chExt cx="0" cy="0"/>
+        </a:xfrm>
+      </p:grpSpPr>
+      <p:sp>
+        <p:nvSpPr>
+          <p:cNvPr id="2" name="Slide Image Placeholder 1"/>
+          <p:cNvSpPr>
+            <a:spLocks noGrp="1"/>
+          </p:cNvSpPr>
+          <p:nvPr>
+            <p:ph type="sldImg" idx="2"/>
+          </p:nvPr>
+        </p:nvSpPr>
+        <p:spPr/>
+      </p:sp>
+      <p:sp>
+        <p:nvSpPr>
+          <p:cNvPr id="3" name="Notes Placeholder 2"/>
+          <p:cNvSpPr>
+            <a:spLocks noGrp="1"/>
+          </p:cNvSpPr>
+          <p:nvPr>
+            <p:ph type="body" idx="3" sz="quarter"/>
+          </p:nvPr>
+        </p:nvSpPr>
+        <p:spPr/>
+        <p:txBody>
+          <a:bodyPr/>
+          <a:lstStyle/>
+          <a:p>
+            <a:r>
               <a:t>Close by connecting this recap back to the lecture: the audit-script anatomy diagram, the quarantine-workflow diagram, the dormant-account and LastLogonDate slides, and the LDAP tree/filter-syntax slides earlier this section together cover everything needed here - the goal is zero surprises, only applying what was just taught against a real assigned environment.</a:t>
             </a:r>
           </a:p>
@@ -7045,7 +7116,7 @@
           <a:lstStyle/>
           <a:p>
             <a:r>
-              <a:t>This is the concrete answer to “how do permissions actually pass from AD through RADIUS to a network device”: in this setup it's a binary authorization gate enforced inside FreeRADIUS's own LDAP query, not a privilege level or VLAN carried back on the Access-Accept. A correct password alone isn't enough - bmartinez proves that directly, since her password is right but she's not in NetworkAdmins, so she's rejected before RADIUS even gets to caring about the password. Worth naming the contrast explicitly: production RADIUS deployments often go further and carry a specific privilege level or VLAN back as an Access-Accept reply attribute (mentioned briefly on the RADIUS Protocol Basics slide - things like a vendor-specific attribute for a Cisco privilege level) - that's a real, common pattern, just not what this particular setup implements. Here, authorization is all-or-nothing at the group-membership gate.</a:t>
+              <a:t>This is the concrete answer to “how do permissions actually pass from AD through RADIUS to a network device”: in this setup it's a binary authorization gate enforced inside FreeRADIUS's own LDAP query, not a privilege level or VLAN carried back on the Access-Accept. A correct password alone isn't enough - bmartinez proves that directly, since her password is right but she's not in NetworkAdmins, so she's rejected before RADIUS even gets to caring about the password. Worth naming the contrast explicitly: production RADIUS deployments often go further and carry a specific privilege level or VLAN back as an Access-Accept reply attribute - covered in more depth on the next slide - but that's a real, common pattern, just not what this particular setup implements. Here, authorization is all-or-nothing at the group-membership gate.</a:t>
             </a:r>
           </a:p>
         </p:txBody>
@@ -7185,7 +7256,7 @@
           <a:lstStyle/>
           <a:p>
             <a:r>
-              <a:t>This closes Section 07's attack-spotlight run by pointing out an irony worth naming directly across all four of these: RADIUS and LDAP both solve real credential-sprawl and directory-query problems, but each introduces its own new trust relationship - anonymous bind here, the RADIUS shared secret two slides from now - that has to be managed carefully, or you've just moved the weak point rather than eliminated it.</a:t>
+              <a:t>Land the two-mechanism split explicitly, since it's easy to blur the two together: the previous slide's LDAP filter is a gate - it decides whether RADIUS even sends an Access-Accept at all. This slide's reply attribute is an assignment - once accepted, it decides what that account is actually allowed to do on the device. Both commonly reuse the exact same underlying signal (AD group membership), which is worth pointing out - the difference is just what fires afterward: nothing/reject for the gate, versus a specific Cisco-AVPair value for the assignment. This is the piece a real enterprise deployment almost always adds on top of a binary authenticate/reject gate like the one this lab builds - one flat NetworkAdmins group is fine for a lab, but production environments usually want tiered privilege levels (or a VLAN assignment, which works the same way via a different VSA) rather than "all admins get full enable access."</a:t>
             </a:r>
           </a:p>
         </p:txBody>
@@ -7255,7 +7326,7 @@
           <a:lstStyle/>
           <a:p>
             <a:r>
-              <a:t>Connect this directly to the FreeRADIUS-via-LDAP slide from earlier this section - that setup specifically required PAP because the AD bind sends a password in the clear over LDAP, which is exactly this vulnerability in action. LDAPS wrapping that connection in TLS is the fix in both contexts.</a:t>
+              <a:t>This closes Section 07's attack-spotlight run by pointing out an irony worth naming directly across all four of these: RADIUS and LDAP both solve real credential-sprawl and directory-query problems, but each introduces its own new trust relationship - anonymous bind here, the RADIUS shared secret two slides from now - that has to be managed carefully, or you've just moved the weak point rather than eliminated it.</a:t>
             </a:r>
           </a:p>
         </p:txBody>
@@ -7325,7 +7396,7 @@
           <a:lstStyle/>
           <a:p>
             <a:r>
-              <a:t>Tie this back to the RADIUS AAA flow diagram - the shared secret IS the trust relationship between NAS and RADIUS server, so a weak or reused one undermines the entire authentication chain no matter how strong the user's own password is.</a:t>
+              <a:t>Connect this directly to the FreeRADIUS-via-LDAP slide from earlier this section - that setup specifically required PAP because the AD bind sends a password in the clear over LDAP, which is exactly this vulnerability in action. LDAPS wrapping that connection in TLS is the fix in both contexts.</a:t>
             </a:r>
           </a:p>
         </p:txBody>
@@ -7395,7 +7466,7 @@
           <a:lstStyle/>
           <a:p>
             <a:r>
-              <a:t>This is a good closing thought before the dormant-account material - a different kind of trust-relationship decay. RADIUS predates modern transport-security assumptions (a point made on the RADIUS Protocol Basics slide), and RadSec exists specifically to wrap that legacy protocol in TLS/TCP for organizations that can't tolerate its original weaknesses.</a:t>
+              <a:t>Tie this back to the RADIUS AAA flow diagram - the shared secret IS the trust relationship between NAS and RADIUS server, so a weak or reused one undermines the entire authentication chain no matter how strong the user's own password is.</a:t>
             </a:r>
           </a:p>
         </p:txBody>
@@ -7465,7 +7536,7 @@
           <a:lstStyle/>
           <a:p>
             <a:r>
-              <a:t>(~30 sec) Same closing pattern as Week 1/2 - a short conceptual bridge into this week's core theme, then a recap and Q&amp;A.</a:t>
+              <a:t>This is a good closing thought before the dormant-account material - a different kind of trust-relationship decay. RADIUS predates modern transport-security assumptions (a point made on the RADIUS Protocol Basics slide), and RadSec exists specifically to wrap that legacy protocol in TLS/TCP for organizations that can't tolerate its original weaknesses.</a:t>
             </a:r>
           </a:p>
         </p:txBody>
@@ -7535,7 +7606,7 @@
           <a:lstStyle/>
           <a:p>
             <a:r>
-              <a:t>Land the Colonial Pipeline detail specifically: it wasn't a sophisticated exploit, it was a forgotten VPN account with a reused, previously-leaked password and no MFA - the security failure was entirely about account lifecycle hygiene, not clever attacker tradecraft. That's the whole argument for building the audit-and-remediate habit this week covers: dormant-account sweeps aren't busywork, they close exactly this kind of gap before it becomes an entry point.</a:t>
+              <a:t>(~30 sec) Same closing pattern as Week 1/2 - a short conceptual bridge into this week's core theme, then a recap and Q&amp;A.</a:t>
             </a:r>
           </a:p>
         </p:txBody>
@@ -7605,7 +7676,7 @@
           <a:lstStyle/>
           <a:p>
             <a:r>
-              <a:t>LastLogonDate specifically reflects interactive and Kerberos ticket-granting activity, replicated with a real default lag (~14 days) - not just “logs can be wrong” hand-waving. The fix is never a single better field, it's pairing this signal with PasswordLastSet, federated sign-in logs, and mailbox activity so no single narrow or lagging signal drives a deletion decision on its own.</a:t>
+              <a:t>Land the Colonial Pipeline detail specifically: it wasn't a sophisticated exploit, it was a forgotten VPN account with a reused, previously-leaked password and no MFA - the security failure was entirely about account lifecycle hygiene, not clever attacker tradecraft. That's the whole argument for building the audit-and-remediate habit this week covers: dormant-account sweeps aren't busywork, they close exactly this kind of gap before it becomes an entry point.</a:t>
             </a:r>
           </a:p>
         </p:txBody>
@@ -7675,7 +7746,7 @@
           <a:lstStyle/>
           <a:p>
             <a:r>
-              <a:t>Walk all four steps in order - doing all four for every flagged account matters, not just disabling; it's easy to disable and stop there. On the quarantine-duration callout, be concrete: ~90 days gives an account owner or their manager a real chance to flag a false positive, and requiring sign-off from someone other than whoever ran the sweep means final deletion is never a unilateral action by one admin. Connect back to Section 01's OU=Disabled slide: the OU existed in the tiering design from day one specifically so this reversible path is available.</a:t>
+              <a:t>LastLogonDate specifically reflects interactive and Kerberos ticket-granting activity, replicated with a real default lag (~14 days) - not just “logs can be wrong” hand-waving. The fix is never a single better field, it's pairing this signal with PasswordLastSet, federated sign-in logs, and mailbox activity so no single narrow or lagging signal drives a deletion decision on its own.</a:t>
             </a:r>
           </a:p>
         </p:txBody>
@@ -7745,7 +7816,7 @@
           <a:lstStyle/>
           <a:p>
             <a:r>
-              <a:t>This is deliberately the first of the last conceptual run of slides before the recap, tying together Section 04's Task Scheduler content and the quarantine workflow. Ask the class: what could go wrong at scale with an all-manual process like this? Human error at volume is the most obvious answer, and a ticket-per-account workflow with two-person approval is the standard operational fix - it forces a second set of eyes before anything irreversible happens.</a:t>
+              <a:t>Walk all four steps in order - doing all four for every flagged account matters, not just disabling; it's easy to disable and stop there. On the quarantine-duration callout, be concrete: ~90 days gives an account owner or their manager a real chance to flag a false positive, and requiring sign-off from someone other than whoever ran the sweep means final deletion is never a unilateral action by one admin. Connect back to Section 01's OU=Disabled slide: the OU existed in the tiering design from day one specifically so this reversible path is available.</a:t>
             </a:r>
           </a:p>
         </p:txBody>
@@ -7815,7 +7886,7 @@
           <a:lstStyle/>
           <a:p>
             <a:r>
-              <a:t>A dry-run mode is worth explaining concretely: the script reports what it WOULD do to each account without actually touching anything, so a human can review the plan against the original audit findings before any account is disabled, described, or moved - catching mistakes before they're real instead of after.</a:t>
+              <a:t>This is deliberately the first of the last conceptual run of slides before the recap, tying together Section 04's Task Scheduler content and the quarantine workflow. Ask the class: what could go wrong at scale with an all-manual process like this? Human error at volume is the most obvious answer, and a ticket-per-account workflow with two-person approval is the standard operational fix - it forces a second set of eyes before anything irreversible happens.</a:t>
             </a:r>
           </a:p>
         </p:txBody>
@@ -11495,7 +11566,7 @@
                 </a:solidFill>
                 <a:latin typeface="Cambria"/>
               </a:rPr>
-              <a:t>Delayed Remediation</a:t>
+              <a:t>No Verification Trail</a:t>
             </a:r>
           </a:p>
         </p:txBody>
@@ -11583,7 +11654,7 @@
                 </a:solidFill>
                 <a:latin typeface="Calibri"/>
               </a:rPr>
-              <a:t>New accounts keep going</a:t>
+              <a:t>Remediation happens</a:t>
             </a:r>
           </a:p>
           <a:p>
@@ -11595,7 +11666,7 @@
                 </a:solidFill>
                 <a:latin typeface="Calibri"/>
               </a:rPr>
-              <a:t>stale continuously</a:t>
+              <a:t>without structured logging</a:t>
             </a:r>
           </a:p>
         </p:txBody>
@@ -11649,7 +11720,7 @@
                 </a:solidFill>
                 <a:latin typeface="Calibri"/>
               </a:rPr>
-              <a:t>A manual process can't</a:t>
+              <a:t>No way to confirm every</a:t>
             </a:r>
           </a:p>
           <a:p>
@@ -11661,7 +11732,19 @@
                 </a:solidFill>
                 <a:latin typeface="Calibri"/>
               </a:rPr>
-              <a:t>keep pace with that rate</a:t>
+              <a:t>flagged account was</a:t>
+            </a:r>
+          </a:p>
+          <a:p>
+            <a:pPr algn="ctr"/>
+            <a:r>
+              <a:rPr sz="1100" b="1" i="0">
+                <a:solidFill>
+                  <a:srgbClr val="111B30"/>
+                </a:solidFill>
+                <a:latin typeface="Calibri"/>
+              </a:rPr>
+              <a:t>actually fixed correctly</a:t>
             </a:r>
           </a:p>
         </p:txBody>
@@ -11715,7 +11798,7 @@
                 </a:solidFill>
                 <a:latin typeface="Calibri"/>
               </a:rPr>
-              <a:t>The backlog of unremediated</a:t>
+              <a:t>Errors go undetected until</a:t>
             </a:r>
           </a:p>
           <a:p>
@@ -11727,7 +11810,19 @@
                 </a:solidFill>
                 <a:latin typeface="Calibri"/>
               </a:rPr>
-              <a:t>stale accounts keeps growing</a:t>
+              <a:t>something breaks or an</a:t>
+            </a:r>
+          </a:p>
+          <a:p>
+            <a:pPr algn="ctr"/>
+            <a:r>
+              <a:rPr sz="1100" b="0" i="0">
+                <a:solidFill>
+                  <a:srgbClr val="111B30"/>
+                </a:solidFill>
+                <a:latin typeface="Calibri"/>
+              </a:rPr>
+              <a:t>audit finds them later</a:t>
             </a:r>
           </a:p>
         </p:txBody>
@@ -11853,7 +11948,7 @@
                 </a:solidFill>
                 <a:latin typeface="Calibri"/>
               </a:rPr>
-              <a:t>MITIGATION: Scheduled re-runs of the audit script (Section 04) even if remediation stays manual</a:t>
+              <a:t>MITIGATION: A dry-run/report mode before any account is touched, reviewed against the findings</a:t>
             </a:r>
           </a:p>
         </p:txBody>
@@ -11951,7 +12046,7 @@
                 </a:solidFill>
                 <a:latin typeface="Cambria"/>
               </a:rPr>
-              <a:t>Full Automation Without Review</a:t>
+              <a:t>Delayed Remediation</a:t>
             </a:r>
           </a:p>
         </p:txBody>
@@ -12039,7 +12134,7 @@
                 </a:solidFill>
                 <a:latin typeface="Calibri"/>
               </a:rPr>
-              <a:t>Remediation is fully</a:t>
+              <a:t>New accounts keep going</a:t>
             </a:r>
           </a:p>
           <a:p>
@@ -12051,7 +12146,7 @@
                 </a:solidFill>
                 <a:latin typeface="Calibri"/>
               </a:rPr>
-              <a:t>automated, zero human check</a:t>
+              <a:t>stale continuously</a:t>
             </a:r>
           </a:p>
         </p:txBody>
@@ -12105,7 +12200,7 @@
                 </a:solidFill>
                 <a:latin typeface="Calibri"/>
               </a:rPr>
-              <a:t>Auto-disables or deletes</a:t>
+              <a:t>A manual process can't</a:t>
             </a:r>
           </a:p>
           <a:p>
@@ -12117,19 +12212,7 @@
                 </a:solidFill>
                 <a:latin typeface="Calibri"/>
               </a:rPr>
-              <a:t>accounts based on the</a:t>
-            </a:r>
-          </a:p>
-          <a:p>
-            <a:pPr algn="ctr"/>
-            <a:r>
-              <a:rPr sz="1100" b="1" i="0">
-                <a:solidFill>
-                  <a:srgbClr val="111B30"/>
-                </a:solidFill>
-                <a:latin typeface="Calibri"/>
-              </a:rPr>
-              <a:t>audit script alone</a:t>
+              <a:t>keep pace with that rate</a:t>
             </a:r>
           </a:p>
         </p:txBody>
@@ -12183,7 +12266,7 @@
                 </a:solidFill>
                 <a:latin typeface="Calibri"/>
               </a:rPr>
-              <a:t>False positives disable or</a:t>
+              <a:t>The backlog of unremediated</a:t>
             </a:r>
           </a:p>
           <a:p>
@@ -12195,19 +12278,7 @@
                 </a:solidFill>
                 <a:latin typeface="Calibri"/>
               </a:rPr>
-              <a:t>delete active, legitimate</a:t>
-            </a:r>
-          </a:p>
-          <a:p>
-            <a:pPr algn="ctr"/>
-            <a:r>
-              <a:rPr sz="1100" b="0" i="0">
-                <a:solidFill>
-                  <a:srgbClr val="111B30"/>
-                </a:solidFill>
-                <a:latin typeface="Calibri"/>
-              </a:rPr>
-              <a:t>accounts</a:t>
+              <a:t>stale accounts keeps growing</a:t>
             </a:r>
           </a:p>
         </p:txBody>
@@ -12333,7 +12404,7 @@
                 </a:solidFill>
                 <a:latin typeface="Calibri"/>
               </a:rPr>
-              <a:t>MITIGATION: Idempotent scripting so a partial run can be safely re-run, plus a human approval gate</a:t>
+              <a:t>MITIGATION: Scheduled re-runs of the audit script (Section 04) even if remediation stays manual</a:t>
             </a:r>
           </a:p>
         </p:txBody>
@@ -12431,7 +12502,7 @@
                 </a:solidFill>
                 <a:latin typeface="Cambria"/>
               </a:rPr>
-              <a:t>Hands-On Exercise Recap: Active Directory, GPO &amp; Centralized AAA</a:t>
+              <a:t>Full Automation Without Review</a:t>
             </a:r>
           </a:p>
         </p:txBody>
@@ -12444,8 +12515,8 @@
         </p:nvSpPr>
         <p:spPr>
           <a:xfrm>
-            <a:off x="685800" y="1554480"/>
-            <a:ext cx="10820095" cy="4892040"/>
+            <a:off x="640080" y="1243584"/>
+            <a:ext cx="10911535" cy="411480"/>
           </a:xfrm>
           <a:prstGeom prst="rect">
             <a:avLst/>
@@ -12458,71 +12529,403 @@
           </a:bodyPr>
           <a:lstStyle/>
           <a:p>
-            <a:pPr algn="l">
-              <a:spcAft>
-                <a:spcPts val="1200"/>
-              </a:spcAft>
-            </a:pPr>
-            <a:r>
-              <a:rPr sz="1600" b="0" i="0">
-                <a:solidFill>
-                  <a:srgbClr val="111B30"/>
-                </a:solidFill>
-                <a:latin typeface="Calibri"/>
-              </a:rPr>
-              <a:t>●   Objectives: verify a pre-promoted DC; build a multi-tiered OU structure; implement Security Baseline + Audit Policy GPOs; configure a PSO; test lockout/audit; deploy a minimal FreeRADIUS instance that authenticates against the domain, scoped to a specific admin group</a:t>
-            </a:r>
-          </a:p>
-          <a:p>
-            <a:pPr algn="l">
-              <a:spcAft>
-                <a:spcPts val="1200"/>
-              </a:spcAft>
-            </a:pPr>
-            <a:r>
-              <a:rPr sz="1600" b="0" i="0">
-                <a:solidFill>
-                  <a:srgbClr val="111B30"/>
-                </a:solidFill>
-                <a:latin typeface="Calibri"/>
-              </a:rPr>
-              <a:t>●   Tools/Accounts: a dedicated domain controller VM (already promoted), a separate Linux VM for FreeRADIUS, GPMC, ADUC, ADAC, ldapsearch</a:t>
-            </a:r>
-          </a:p>
-          <a:p>
-            <a:pPr algn="l">
-              <a:spcAft>
-                <a:spcPts val="1200"/>
-              </a:spcAft>
-            </a:pPr>
-            <a:r>
-              <a:rPr sz="1600" b="0" i="0">
-                <a:solidFill>
-                  <a:srgbClr val="111B30"/>
-                </a:solidFill>
-                <a:latin typeface="Calibri"/>
-              </a:rPr>
-              <a:t>●   Structure: PowerShell-first - OUs, users, and groups built via cmdlets rather than the GUI</a:t>
-            </a:r>
-          </a:p>
-          <a:p>
-            <a:pPr algn="l">
-              <a:spcAft>
-                <a:spcPts val="1200"/>
-              </a:spcAft>
-            </a:pPr>
-            <a:r>
-              <a:rPr sz="1600" b="0" i="0">
-                <a:solidFill>
-                  <a:srgbClr val="111B30"/>
-                </a:solidFill>
-                <a:latin typeface="Calibri"/>
-              </a:rPr>
-              <a:t>●   Framing theme: every control here maps to a specific attack it prevents, not just administrative housekeeping</a:t>
-            </a:r>
-          </a:p>
-        </p:txBody>
-      </p:sp>
+            <a:r>
+              <a:rPr sz="1350" b="0" i="1">
+                <a:solidFill>
+                  <a:srgbClr val="B02A2A"/>
+                </a:solidFill>
+                <a:latin typeface="Calibri"/>
+              </a:rPr>
+              <a:t>Risk Spotlight</a:t>
+            </a:r>
+          </a:p>
+        </p:txBody>
+      </p:sp>
+      <p:sp>
+        <p:nvSpPr>
+          <p:cNvPr id="4" name="Rounded Rectangle 3"/>
+          <p:cNvSpPr/>
+          <p:nvPr/>
+        </p:nvSpPr>
+        <p:spPr>
+          <a:xfrm>
+            <a:off x="822960" y="2286000"/>
+            <a:ext cx="3108960" cy="1188720"/>
+          </a:xfrm>
+          <a:prstGeom prst="roundRect">
+            <a:avLst/>
+          </a:prstGeom>
+          <a:solidFill>
+            <a:srgbClr val="E8EEF7"/>
+          </a:solidFill>
+          <a:ln w="15875">
+            <a:solidFill>
+              <a:srgbClr val="B02A2A"/>
+            </a:solidFill>
+          </a:ln>
+        </p:spPr>
+        <p:style>
+          <a:lnRef idx="1">
+            <a:schemeClr val="accent1"/>
+          </a:lnRef>
+          <a:fillRef idx="3">
+            <a:schemeClr val="accent1"/>
+          </a:fillRef>
+          <a:effectRef idx="2">
+            <a:schemeClr val="accent1"/>
+          </a:effectRef>
+          <a:fontRef idx="minor">
+            <a:schemeClr val="lt1"/>
+          </a:fontRef>
+        </p:style>
+        <p:txBody>
+          <a:bodyPr rtlCol="0" anchor="ctr" wrap="square" lIns="38100" rIns="38100" tIns="12700" bIns="12700"/>
+          <a:lstStyle/>
+          <a:p>
+            <a:pPr algn="ctr"/>
+            <a:r>
+              <a:rPr sz="1100" b="0" i="0">
+                <a:solidFill>
+                  <a:srgbClr val="111B30"/>
+                </a:solidFill>
+                <a:latin typeface="Calibri"/>
+              </a:rPr>
+              <a:t>Remediation is fully</a:t>
+            </a:r>
+          </a:p>
+          <a:p>
+            <a:pPr algn="ctr"/>
+            <a:r>
+              <a:rPr sz="1100" b="0" i="0">
+                <a:solidFill>
+                  <a:srgbClr val="111B30"/>
+                </a:solidFill>
+                <a:latin typeface="Calibri"/>
+              </a:rPr>
+              <a:t>automated, zero human check</a:t>
+            </a:r>
+          </a:p>
+        </p:txBody>
+      </p:sp>
+      <p:sp>
+        <p:nvSpPr>
+          <p:cNvPr id="5" name="Rounded Rectangle 4"/>
+          <p:cNvSpPr/>
+          <p:nvPr/>
+        </p:nvSpPr>
+        <p:spPr>
+          <a:xfrm>
+            <a:off x="4544568" y="2286000"/>
+            <a:ext cx="3108960" cy="1188720"/>
+          </a:xfrm>
+          <a:prstGeom prst="roundRect">
+            <a:avLst/>
+          </a:prstGeom>
+          <a:solidFill>
+            <a:srgbClr val="FFFFFF"/>
+          </a:solidFill>
+          <a:ln w="15875">
+            <a:solidFill>
+              <a:srgbClr val="B02A2A"/>
+            </a:solidFill>
+          </a:ln>
+        </p:spPr>
+        <p:style>
+          <a:lnRef idx="1">
+            <a:schemeClr val="accent1"/>
+          </a:lnRef>
+          <a:fillRef idx="3">
+            <a:schemeClr val="accent1"/>
+          </a:fillRef>
+          <a:effectRef idx="2">
+            <a:schemeClr val="accent1"/>
+          </a:effectRef>
+          <a:fontRef idx="minor">
+            <a:schemeClr val="lt1"/>
+          </a:fontRef>
+        </p:style>
+        <p:txBody>
+          <a:bodyPr rtlCol="0" anchor="ctr" wrap="square" lIns="38100" rIns="38100" tIns="12700" bIns="12700"/>
+          <a:lstStyle/>
+          <a:p>
+            <a:pPr algn="ctr"/>
+            <a:r>
+              <a:rPr sz="1100" b="1" i="0">
+                <a:solidFill>
+                  <a:srgbClr val="111B30"/>
+                </a:solidFill>
+                <a:latin typeface="Calibri"/>
+              </a:rPr>
+              <a:t>Auto-disables or deletes</a:t>
+            </a:r>
+          </a:p>
+          <a:p>
+            <a:pPr algn="ctr"/>
+            <a:r>
+              <a:rPr sz="1100" b="1" i="0">
+                <a:solidFill>
+                  <a:srgbClr val="111B30"/>
+                </a:solidFill>
+                <a:latin typeface="Calibri"/>
+              </a:rPr>
+              <a:t>accounts based on the</a:t>
+            </a:r>
+          </a:p>
+          <a:p>
+            <a:pPr algn="ctr"/>
+            <a:r>
+              <a:rPr sz="1100" b="1" i="0">
+                <a:solidFill>
+                  <a:srgbClr val="111B30"/>
+                </a:solidFill>
+                <a:latin typeface="Calibri"/>
+              </a:rPr>
+              <a:t>audit script alone</a:t>
+            </a:r>
+          </a:p>
+        </p:txBody>
+      </p:sp>
+      <p:sp>
+        <p:nvSpPr>
+          <p:cNvPr id="6" name="Rounded Rectangle 5"/>
+          <p:cNvSpPr/>
+          <p:nvPr/>
+        </p:nvSpPr>
+        <p:spPr>
+          <a:xfrm>
+            <a:off x="8266175" y="2286000"/>
+            <a:ext cx="3108960" cy="1188720"/>
+          </a:xfrm>
+          <a:prstGeom prst="roundRect">
+            <a:avLst/>
+          </a:prstGeom>
+          <a:solidFill>
+            <a:srgbClr val="E8EEF7"/>
+          </a:solidFill>
+          <a:ln w="15875">
+            <a:solidFill>
+              <a:srgbClr val="B02A2A"/>
+            </a:solidFill>
+          </a:ln>
+        </p:spPr>
+        <p:style>
+          <a:lnRef idx="1">
+            <a:schemeClr val="accent1"/>
+          </a:lnRef>
+          <a:fillRef idx="3">
+            <a:schemeClr val="accent1"/>
+          </a:fillRef>
+          <a:effectRef idx="2">
+            <a:schemeClr val="accent1"/>
+          </a:effectRef>
+          <a:fontRef idx="minor">
+            <a:schemeClr val="lt1"/>
+          </a:fontRef>
+        </p:style>
+        <p:txBody>
+          <a:bodyPr rtlCol="0" anchor="ctr" wrap="square" lIns="38100" rIns="38100" tIns="12700" bIns="12700"/>
+          <a:lstStyle/>
+          <a:p>
+            <a:pPr algn="ctr"/>
+            <a:r>
+              <a:rPr sz="1100" b="0" i="0">
+                <a:solidFill>
+                  <a:srgbClr val="111B30"/>
+                </a:solidFill>
+                <a:latin typeface="Calibri"/>
+              </a:rPr>
+              <a:t>False positives disable or</a:t>
+            </a:r>
+          </a:p>
+          <a:p>
+            <a:pPr algn="ctr"/>
+            <a:r>
+              <a:rPr sz="1100" b="0" i="0">
+                <a:solidFill>
+                  <a:srgbClr val="111B30"/>
+                </a:solidFill>
+                <a:latin typeface="Calibri"/>
+              </a:rPr>
+              <a:t>delete active, legitimate</a:t>
+            </a:r>
+          </a:p>
+          <a:p>
+            <a:pPr algn="ctr"/>
+            <a:r>
+              <a:rPr sz="1100" b="0" i="0">
+                <a:solidFill>
+                  <a:srgbClr val="111B30"/>
+                </a:solidFill>
+                <a:latin typeface="Calibri"/>
+              </a:rPr>
+              <a:t>accounts</a:t>
+            </a:r>
+          </a:p>
+        </p:txBody>
+      </p:sp>
+      <p:cxnSp>
+        <p:nvCxnSpPr>
+          <p:cNvPr id="7" name="Connector 6"/>
+          <p:cNvCxnSpPr/>
+          <p:nvPr/>
+        </p:nvCxnSpPr>
+        <p:spPr>
+          <a:xfrm>
+            <a:off x="3931920" y="2880360"/>
+            <a:ext cx="612648" cy="0"/>
+          </a:xfrm>
+          <a:prstGeom prst="line">
+            <a:avLst/>
+          </a:prstGeom>
+          <a:ln w="25400">
+            <a:solidFill>
+              <a:srgbClr val="B02A2A"/>
+            </a:solidFill>
+            <a:tailEnd type="triangle" w="med" len="med"/>
+          </a:ln>
+        </p:spPr>
+        <p:style>
+          <a:lnRef idx="2">
+            <a:schemeClr val="accent1"/>
+          </a:lnRef>
+          <a:fillRef idx="0">
+            <a:schemeClr val="accent1"/>
+          </a:fillRef>
+          <a:effectRef idx="1">
+            <a:schemeClr val="accent1"/>
+          </a:effectRef>
+          <a:fontRef idx="minor">
+            <a:schemeClr val="tx1"/>
+          </a:fontRef>
+        </p:style>
+      </p:cxnSp>
+      <p:cxnSp>
+        <p:nvCxnSpPr>
+          <p:cNvPr id="8" name="Connector 7"/>
+          <p:cNvCxnSpPr/>
+          <p:nvPr/>
+        </p:nvCxnSpPr>
+        <p:spPr>
+          <a:xfrm>
+            <a:off x="7653527" y="2880360"/>
+            <a:ext cx="612648" cy="0"/>
+          </a:xfrm>
+          <a:prstGeom prst="line">
+            <a:avLst/>
+          </a:prstGeom>
+          <a:ln w="25400">
+            <a:solidFill>
+              <a:srgbClr val="B02A2A"/>
+            </a:solidFill>
+            <a:tailEnd type="triangle" w="med" len="med"/>
+          </a:ln>
+        </p:spPr>
+        <p:style>
+          <a:lnRef idx="2">
+            <a:schemeClr val="accent1"/>
+          </a:lnRef>
+          <a:fillRef idx="0">
+            <a:schemeClr val="accent1"/>
+          </a:fillRef>
+          <a:effectRef idx="1">
+            <a:schemeClr val="accent1"/>
+          </a:effectRef>
+          <a:fontRef idx="minor">
+            <a:schemeClr val="tx1"/>
+          </a:fontRef>
+        </p:style>
+      </p:cxnSp>
+      <p:sp>
+        <p:nvSpPr>
+          <p:cNvPr id="9" name="Rounded Rectangle 8"/>
+          <p:cNvSpPr/>
+          <p:nvPr/>
+        </p:nvSpPr>
+        <p:spPr>
+          <a:xfrm>
+            <a:off x="1737360" y="4023360"/>
+            <a:ext cx="8714232" cy="1005840"/>
+          </a:xfrm>
+          <a:prstGeom prst="roundRect">
+            <a:avLst/>
+          </a:prstGeom>
+          <a:solidFill>
+            <a:srgbClr val="E8EEF7"/>
+          </a:solidFill>
+          <a:ln w="15875">
+            <a:solidFill>
+              <a:srgbClr val="2E7D32"/>
+            </a:solidFill>
+          </a:ln>
+        </p:spPr>
+        <p:style>
+          <a:lnRef idx="1">
+            <a:schemeClr val="accent1"/>
+          </a:lnRef>
+          <a:fillRef idx="3">
+            <a:schemeClr val="accent1"/>
+          </a:fillRef>
+          <a:effectRef idx="2">
+            <a:schemeClr val="accent1"/>
+          </a:effectRef>
+          <a:fontRef idx="minor">
+            <a:schemeClr val="lt1"/>
+          </a:fontRef>
+        </p:style>
+        <p:txBody>
+          <a:bodyPr rtlCol="0" anchor="ctr" wrap="square" lIns="38100" rIns="38100" tIns="12700" bIns="12700"/>
+          <a:lstStyle/>
+          <a:p>
+            <a:pPr algn="ctr"/>
+            <a:r>
+              <a:rPr sz="1200" b="1" i="0">
+                <a:solidFill>
+                  <a:srgbClr val="2E7D32"/>
+                </a:solidFill>
+                <a:latin typeface="Calibri"/>
+              </a:rPr>
+              <a:t>MITIGATION: Idempotent scripting so a partial run can be safely re-run, plus a human approval gate</a:t>
+            </a:r>
+          </a:p>
+        </p:txBody>
+      </p:sp>
+      <p:cxnSp>
+        <p:nvCxnSpPr>
+          <p:cNvPr id="10" name="Connector 9"/>
+          <p:cNvCxnSpPr/>
+          <p:nvPr/>
+        </p:nvCxnSpPr>
+        <p:spPr>
+          <a:xfrm flipH="1">
+            <a:off x="6094475" y="3474720"/>
+            <a:ext cx="4573" cy="548640"/>
+          </a:xfrm>
+          <a:prstGeom prst="line">
+            <a:avLst/>
+          </a:prstGeom>
+          <a:ln w="19050">
+            <a:solidFill>
+              <a:srgbClr val="2E7D32"/>
+            </a:solidFill>
+            <a:prstDash val="dash"/>
+            <a:tailEnd type="triangle" w="med" len="med"/>
+          </a:ln>
+        </p:spPr>
+        <p:style>
+          <a:lnRef idx="2">
+            <a:schemeClr val="accent1"/>
+          </a:lnRef>
+          <a:fillRef idx="0">
+            <a:schemeClr val="accent1"/>
+          </a:fillRef>
+          <a:effectRef idx="1">
+            <a:schemeClr val="accent1"/>
+          </a:effectRef>
+          <a:fontRef idx="minor">
+            <a:schemeClr val="tx1"/>
+          </a:fontRef>
+        </p:style>
+      </p:cxnSp>
     </p:spTree>
   </p:cSld>
   <p:clrMapOvr>
@@ -12532,6 +12935,154 @@
 </file>
 
 <file path=ppt/slides/slide103.xml><?xml version="1.0" encoding="utf-8"?>
+<p:sld xmlns:a="http://schemas.openxmlformats.org/drawingml/2006/main" xmlns:p="http://schemas.openxmlformats.org/presentationml/2006/main" xmlns:r="http://schemas.openxmlformats.org/officeDocument/2006/relationships">
+  <p:cSld>
+    <p:bg>
+      <p:bgPr>
+        <a:solidFill>
+          <a:srgbClr val="FFFFFF"/>
+        </a:solidFill>
+        <a:effectLst/>
+      </p:bgPr>
+    </p:bg>
+    <p:spTree>
+      <p:nvGrpSpPr>
+        <p:cNvPr id="1" name=""/>
+        <p:cNvGrpSpPr/>
+        <p:nvPr/>
+      </p:nvGrpSpPr>
+      <p:grpSpPr/>
+      <p:sp>
+        <p:nvSpPr>
+          <p:cNvPr id="2" name="TextBox 1"/>
+          <p:cNvSpPr txBox="1"/>
+          <p:nvPr/>
+        </p:nvSpPr>
+        <p:spPr>
+          <a:xfrm>
+            <a:off x="640080" y="457200"/>
+            <a:ext cx="10911535" cy="777240"/>
+          </a:xfrm>
+          <a:prstGeom prst="rect">
+            <a:avLst/>
+          </a:prstGeom>
+          <a:noFill/>
+        </p:spPr>
+        <p:txBody>
+          <a:bodyPr wrap="square" lIns="0" tIns="0">
+            <a:spAutoFit/>
+          </a:bodyPr>
+          <a:lstStyle/>
+          <a:p>
+            <a:pPr algn="l"/>
+            <a:r>
+              <a:rPr sz="2900" b="1" i="0">
+                <a:solidFill>
+                  <a:srgbClr val="1B2A4A"/>
+                </a:solidFill>
+                <a:latin typeface="Cambria"/>
+              </a:rPr>
+              <a:t>Hands-On Exercise Recap: Active Directory, GPO &amp; Centralized AAA</a:t>
+            </a:r>
+          </a:p>
+        </p:txBody>
+      </p:sp>
+      <p:sp>
+        <p:nvSpPr>
+          <p:cNvPr id="3" name="TextBox 2"/>
+          <p:cNvSpPr txBox="1"/>
+          <p:nvPr/>
+        </p:nvSpPr>
+        <p:spPr>
+          <a:xfrm>
+            <a:off x="685800" y="1554480"/>
+            <a:ext cx="10820095" cy="4892040"/>
+          </a:xfrm>
+          <a:prstGeom prst="rect">
+            <a:avLst/>
+          </a:prstGeom>
+          <a:noFill/>
+        </p:spPr>
+        <p:txBody>
+          <a:bodyPr wrap="square" lIns="0" tIns="0">
+            <a:spAutoFit/>
+          </a:bodyPr>
+          <a:lstStyle/>
+          <a:p>
+            <a:pPr algn="l">
+              <a:spcAft>
+                <a:spcPts val="1200"/>
+              </a:spcAft>
+            </a:pPr>
+            <a:r>
+              <a:rPr sz="1600" b="0" i="0">
+                <a:solidFill>
+                  <a:srgbClr val="111B30"/>
+                </a:solidFill>
+                <a:latin typeface="Calibri"/>
+              </a:rPr>
+              <a:t>●   Objectives: verify a pre-promoted DC; build a multi-tiered OU structure; implement Security Baseline + Audit Policy GPOs; configure a PSO; test lockout/audit; deploy a minimal FreeRADIUS instance that authenticates against the domain, scoped to a specific admin group</a:t>
+            </a:r>
+          </a:p>
+          <a:p>
+            <a:pPr algn="l">
+              <a:spcAft>
+                <a:spcPts val="1200"/>
+              </a:spcAft>
+            </a:pPr>
+            <a:r>
+              <a:rPr sz="1600" b="0" i="0">
+                <a:solidFill>
+                  <a:srgbClr val="111B30"/>
+                </a:solidFill>
+                <a:latin typeface="Calibri"/>
+              </a:rPr>
+              <a:t>●   Tools/Accounts: a dedicated domain controller VM (already promoted), a separate Linux VM for FreeRADIUS, GPMC, ADUC, ADAC, ldapsearch</a:t>
+            </a:r>
+          </a:p>
+          <a:p>
+            <a:pPr algn="l">
+              <a:spcAft>
+                <a:spcPts val="1200"/>
+              </a:spcAft>
+            </a:pPr>
+            <a:r>
+              <a:rPr sz="1600" b="0" i="0">
+                <a:solidFill>
+                  <a:srgbClr val="111B30"/>
+                </a:solidFill>
+                <a:latin typeface="Calibri"/>
+              </a:rPr>
+              <a:t>●   Structure: PowerShell-first - OUs, users, and groups built via cmdlets rather than the GUI</a:t>
+            </a:r>
+          </a:p>
+          <a:p>
+            <a:pPr algn="l">
+              <a:spcAft>
+                <a:spcPts val="1200"/>
+              </a:spcAft>
+            </a:pPr>
+            <a:r>
+              <a:rPr sz="1600" b="0" i="0">
+                <a:solidFill>
+                  <a:srgbClr val="111B30"/>
+                </a:solidFill>
+                <a:latin typeface="Calibri"/>
+              </a:rPr>
+              <a:t>●   Framing theme: every control here maps to a specific attack it prevents, not just administrative housekeeping</a:t>
+            </a:r>
+          </a:p>
+        </p:txBody>
+      </p:sp>
+    </p:spTree>
+  </p:cSld>
+  <p:clrMapOvr>
+    <a:masterClrMapping/>
+  </p:clrMapOvr>
+</p:sld>
+</file>
+
+<file path=ppt/slides/slide104.xml><?xml version="1.0" encoding="utf-8"?>
 <p:sld xmlns:a="http://schemas.openxmlformats.org/drawingml/2006/main" xmlns:p="http://schemas.openxmlformats.org/presentationml/2006/main" xmlns:r="http://schemas.openxmlformats.org/officeDocument/2006/relationships">
   <p:cSld>
     <p:bg>
@@ -13050,7 +13601,7 @@
 </p:sld>
 </file>
 
-<file path=ppt/slides/slide104.xml><?xml version="1.0" encoding="utf-8"?>
+<file path=ppt/slides/slide105.xml><?xml version="1.0" encoding="utf-8"?>
 <p:sld xmlns:a="http://schemas.openxmlformats.org/drawingml/2006/main" xmlns:p="http://schemas.openxmlformats.org/presentationml/2006/main" xmlns:r="http://schemas.openxmlformats.org/officeDocument/2006/relationships">
   <p:cSld>
     <p:bg>
@@ -52434,7 +52985,7 @@
                 </a:solidFill>
                 <a:latin typeface="Cambria"/>
               </a:rPr>
-              <a:t>LDAP Anonymous Bind</a:t>
+              <a:t>Assigning Privilege Levels via RADIUS</a:t>
             </a:r>
           </a:p>
         </p:txBody>
@@ -52464,25 +53015,96 @@
             <a:r>
               <a:rPr sz="1350" b="0" i="1">
                 <a:solidFill>
-                  <a:srgbClr val="B02A2A"/>
-                </a:solidFill>
-                <a:latin typeface="Calibri"/>
-              </a:rPr>
-              <a:t>Attack Spotlight</a:t>
-            </a:r>
-          </a:p>
-        </p:txBody>
-      </p:sp>
-      <p:sp>
-        <p:nvSpPr>
-          <p:cNvPr id="4" name="Rounded Rectangle 3"/>
+                  <a:srgbClr val="3D5A80"/>
+                </a:solidFill>
+                <a:latin typeface="Calibri"/>
+              </a:rPr>
+              <a:t>Via a reply attribute - the gate (previous slide) decides who gets in; this decides what they get once they're in.</a:t>
+            </a:r>
+          </a:p>
+        </p:txBody>
+      </p:sp>
+      <p:sp>
+        <p:nvSpPr>
+          <p:cNvPr id="4" name="TextBox 3"/>
+          <p:cNvSpPr txBox="1"/>
+          <p:nvPr/>
+        </p:nvSpPr>
+        <p:spPr>
+          <a:xfrm>
+            <a:off x="685800" y="1874519"/>
+            <a:ext cx="10820095" cy="1417320"/>
+          </a:xfrm>
+          <a:prstGeom prst="rect">
+            <a:avLst/>
+          </a:prstGeom>
+          <a:noFill/>
+        </p:spPr>
+        <p:txBody>
+          <a:bodyPr wrap="square" lIns="0" tIns="0">
+            <a:spAutoFit/>
+          </a:bodyPr>
+          <a:lstStyle/>
+          <a:p>
+            <a:pPr algn="l">
+              <a:spcAft>
+                <a:spcPts val="700"/>
+              </a:spcAft>
+            </a:pPr>
+            <a:r>
+              <a:rPr sz="1300" b="0" i="0">
+                <a:solidFill>
+                  <a:srgbClr val="111B30"/>
+                </a:solidFill>
+                <a:latin typeface="Calibri"/>
+              </a:rPr>
+              <a:t>●   The switch has to ask for this: aaa authorization exec default group radius tells it to request a privilege level from RADIUS, not just authenticate</a:t>
+            </a:r>
+          </a:p>
+          <a:p>
+            <a:pPr algn="l">
+              <a:spcAft>
+                <a:spcPts val="700"/>
+              </a:spcAft>
+            </a:pPr>
+            <a:r>
+              <a:rPr sz="1300" b="0" i="0">
+                <a:solidFill>
+                  <a:srgbClr val="111B30"/>
+                </a:solidFill>
+                <a:latin typeface="Calibri"/>
+              </a:rPr>
+              <a:t>●   RADIUS answers via a vendor-specific attribute (VSA) on the Access-Accept - for Cisco gear, Cisco-AVPair = "shell:priv-lvl=15"</a:t>
+            </a:r>
+          </a:p>
+          <a:p>
+            <a:pPr algn="l">
+              <a:spcAft>
+                <a:spcPts val="700"/>
+              </a:spcAft>
+            </a:pPr>
+            <a:r>
+              <a:rPr sz="1300" b="0" i="0">
+                <a:solidFill>
+                  <a:srgbClr val="111B30"/>
+                </a:solidFill>
+                <a:latin typeface="Calibri"/>
+              </a:rPr>
+              <a:t>●   FreeRADIUS picks the value using the same group-membership signal as the gate - an unlang policy branches on LDAP-Group and sets a different Cisco-AVPair per group</a:t>
+            </a:r>
+          </a:p>
+        </p:txBody>
+      </p:sp>
+      <p:sp>
+        <p:nvSpPr>
+          <p:cNvPr id="5" name="Rounded Rectangle 4"/>
           <p:cNvSpPr/>
           <p:nvPr/>
         </p:nvSpPr>
         <p:spPr>
           <a:xfrm>
-            <a:off x="822960" y="2286000"/>
-            <a:ext cx="3108960" cy="1188720"/>
+            <a:off x="914400" y="3474720"/>
+            <a:ext cx="3291840" cy="822960"/>
           </a:xfrm>
           <a:prstGeom prst="roundRect">
             <a:avLst/>
@@ -52492,7 +53114,7 @@
           </a:solidFill>
           <a:ln w="15875">
             <a:solidFill>
-              <a:srgbClr val="B02A2A"/>
+              <a:srgbClr val="1B2A4A"/>
             </a:solidFill>
           </a:ln>
         </p:spPr>
@@ -52516,61 +53138,49 @@
           <a:p>
             <a:pPr algn="ctr"/>
             <a:r>
-              <a:rPr sz="1100" b="0" i="0">
-                <a:solidFill>
-                  <a:srgbClr val="111B30"/>
-                </a:solidFill>
-                <a:latin typeface="Calibri"/>
-              </a:rPr>
-              <a:t>LDAP server allows</a:t>
-            </a:r>
-          </a:p>
-          <a:p>
-            <a:pPr algn="ctr"/>
-            <a:r>
-              <a:rPr sz="1100" b="0" i="0">
-                <a:solidFill>
-                  <a:srgbClr val="111B30"/>
-                </a:solidFill>
-                <a:latin typeface="Calibri"/>
-              </a:rPr>
-              <a:t>anonymous (unauthenticated)</a:t>
-            </a:r>
-          </a:p>
-          <a:p>
-            <a:pPr algn="ctr"/>
-            <a:r>
-              <a:rPr sz="1100" b="0" i="0">
-                <a:solidFill>
-                  <a:srgbClr val="111B30"/>
-                </a:solidFill>
-                <a:latin typeface="Calibri"/>
-              </a:rPr>
-              <a:t>binds</a:t>
-            </a:r>
-          </a:p>
-        </p:txBody>
-      </p:sp>
-      <p:sp>
-        <p:nvSpPr>
-          <p:cNvPr id="5" name="Rounded Rectangle 4"/>
+              <a:rPr sz="1050" b="0" i="0">
+                <a:solidFill>
+                  <a:srgbClr val="111B30"/>
+                </a:solidFill>
+                <a:latin typeface="Calibri"/>
+              </a:rPr>
+              <a:t>NetworkAdmins-L1</a:t>
+            </a:r>
+          </a:p>
+          <a:p>
+            <a:pPr algn="ctr"/>
+            <a:r>
+              <a:rPr sz="1050" b="0" i="0">
+                <a:solidFill>
+                  <a:srgbClr val="111B30"/>
+                </a:solidFill>
+                <a:latin typeface="Calibri"/>
+              </a:rPr>
+              <a:t>(senior admins)</a:t>
+            </a:r>
+          </a:p>
+        </p:txBody>
+      </p:sp>
+      <p:sp>
+        <p:nvSpPr>
+          <p:cNvPr id="6" name="Rounded Rectangle 5"/>
           <p:cNvSpPr/>
           <p:nvPr/>
         </p:nvSpPr>
         <p:spPr>
           <a:xfrm>
-            <a:off x="4544568" y="2286000"/>
-            <a:ext cx="3108960" cy="1188720"/>
+            <a:off x="4572000" y="3474720"/>
+            <a:ext cx="3291840" cy="822960"/>
           </a:xfrm>
           <a:prstGeom prst="roundRect">
             <a:avLst/>
           </a:prstGeom>
           <a:solidFill>
-            <a:srgbClr val="FFFFFF"/>
+            <a:srgbClr val="E8EEF7"/>
           </a:solidFill>
           <a:ln w="15875">
             <a:solidFill>
-              <a:srgbClr val="B02A2A"/>
+              <a:srgbClr val="00B4D8"/>
             </a:solidFill>
           </a:ln>
         </p:spPr>
@@ -52594,51 +53204,39 @@
           <a:p>
             <a:pPr algn="ctr"/>
             <a:r>
-              <a:rPr sz="1100" b="1" i="0">
-                <a:solidFill>
-                  <a:srgbClr val="111B30"/>
-                </a:solidFill>
-                <a:latin typeface="Calibri"/>
-              </a:rPr>
-              <a:t>Attacker queries the</a:t>
-            </a:r>
-          </a:p>
-          <a:p>
-            <a:pPr algn="ctr"/>
-            <a:r>
-              <a:rPr sz="1100" b="1" i="0">
-                <a:solidFill>
-                  <a:srgbClr val="111B30"/>
-                </a:solidFill>
-                <a:latin typeface="Calibri"/>
-              </a:rPr>
-              <a:t>directory with no</a:t>
-            </a:r>
-          </a:p>
-          <a:p>
-            <a:pPr algn="ctr"/>
-            <a:r>
-              <a:rPr sz="1100" b="1" i="0">
-                <a:solidFill>
-                  <a:srgbClr val="111B30"/>
-                </a:solidFill>
-                <a:latin typeface="Calibri"/>
-              </a:rPr>
-              <a:t>credentials at all</a:t>
-            </a:r>
-          </a:p>
-        </p:txBody>
-      </p:sp>
-      <p:sp>
-        <p:nvSpPr>
-          <p:cNvPr id="6" name="Rounded Rectangle 5"/>
+              <a:rPr sz="950" b="0" i="0">
+                <a:solidFill>
+                  <a:srgbClr val="111B30"/>
+                </a:solidFill>
+                <a:latin typeface="Calibri"/>
+              </a:rPr>
+              <a:t>Cisco-AVPair:</a:t>
+            </a:r>
+          </a:p>
+          <a:p>
+            <a:pPr algn="ctr"/>
+            <a:r>
+              <a:rPr sz="950" b="0" i="0">
+                <a:solidFill>
+                  <a:srgbClr val="111B30"/>
+                </a:solidFill>
+                <a:latin typeface="Calibri"/>
+              </a:rPr>
+              <a:t>shell:priv-lvl=15</a:t>
+            </a:r>
+          </a:p>
+        </p:txBody>
+      </p:sp>
+      <p:sp>
+        <p:nvSpPr>
+          <p:cNvPr id="7" name="Rounded Rectangle 6"/>
           <p:cNvSpPr/>
           <p:nvPr/>
         </p:nvSpPr>
         <p:spPr>
           <a:xfrm>
-            <a:off x="8266175" y="2286000"/>
-            <a:ext cx="3108960" cy="1188720"/>
+            <a:off x="8229600" y="3474720"/>
+            <a:ext cx="2743200" cy="822960"/>
           </a:xfrm>
           <a:prstGeom prst="roundRect">
             <a:avLst/>
@@ -52648,7 +53246,7 @@
           </a:solidFill>
           <a:ln w="15875">
             <a:solidFill>
-              <a:srgbClr val="B02A2A"/>
+              <a:srgbClr val="00B4D8"/>
             </a:solidFill>
           </a:ln>
         </p:spPr>
@@ -52672,58 +53270,46 @@
           <a:p>
             <a:pPr algn="ctr"/>
             <a:r>
-              <a:rPr sz="1100" b="0" i="0">
-                <a:solidFill>
-                  <a:srgbClr val="111B30"/>
-                </a:solidFill>
-                <a:latin typeface="Calibri"/>
-              </a:rPr>
-              <a:t>Directory structure and</a:t>
-            </a:r>
-          </a:p>
-          <a:p>
-            <a:pPr algn="ctr"/>
-            <a:r>
-              <a:rPr sz="1100" b="0" i="0">
-                <a:solidFill>
-                  <a:srgbClr val="111B30"/>
-                </a:solidFill>
-                <a:latin typeface="Calibri"/>
-              </a:rPr>
-              <a:t>user data are exposed</a:t>
-            </a:r>
-          </a:p>
-          <a:p>
-            <a:pPr algn="ctr"/>
-            <a:r>
-              <a:rPr sz="1100" b="0" i="0">
-                <a:solidFill>
-                  <a:srgbClr val="111B30"/>
-                </a:solidFill>
-                <a:latin typeface="Calibri"/>
-              </a:rPr>
-              <a:t>to anyone</a:t>
+              <a:rPr sz="1050" b="1" i="0">
+                <a:solidFill>
+                  <a:srgbClr val="1B2A4A"/>
+                </a:solidFill>
+                <a:latin typeface="Calibri"/>
+              </a:rPr>
+              <a:t>Full admin</a:t>
+            </a:r>
+          </a:p>
+          <a:p>
+            <a:pPr algn="ctr"/>
+            <a:r>
+              <a:rPr sz="1050" b="1" i="0">
+                <a:solidFill>
+                  <a:srgbClr val="1B2A4A"/>
+                </a:solidFill>
+                <a:latin typeface="Calibri"/>
+              </a:rPr>
+              <a:t>(enable mode)</a:t>
             </a:r>
           </a:p>
         </p:txBody>
       </p:sp>
       <p:cxnSp>
         <p:nvCxnSpPr>
-          <p:cNvPr id="7" name="Connector 6"/>
+          <p:cNvPr id="8" name="Connector 7"/>
           <p:cNvCxnSpPr/>
           <p:nvPr/>
         </p:nvCxnSpPr>
         <p:spPr>
           <a:xfrm>
-            <a:off x="3931920" y="2880360"/>
-            <a:ext cx="612648" cy="0"/>
+            <a:off x="4206240" y="3886200"/>
+            <a:ext cx="365760" cy="0"/>
           </a:xfrm>
           <a:prstGeom prst="line">
             <a:avLst/>
           </a:prstGeom>
-          <a:ln w="25400">
+          <a:ln w="12700">
             <a:solidFill>
-              <a:srgbClr val="B02A2A"/>
+              <a:srgbClr val="00B4D8"/>
             </a:solidFill>
             <a:tailEnd type="triangle" w="med" len="med"/>
           </a:ln>
@@ -52745,21 +53331,21 @@
       </p:cxnSp>
       <p:cxnSp>
         <p:nvCxnSpPr>
-          <p:cNvPr id="8" name="Connector 7"/>
+          <p:cNvPr id="9" name="Connector 8"/>
           <p:cNvCxnSpPr/>
           <p:nvPr/>
         </p:nvCxnSpPr>
         <p:spPr>
           <a:xfrm>
-            <a:off x="7653527" y="2880360"/>
-            <a:ext cx="612648" cy="0"/>
+            <a:off x="7863840" y="3886200"/>
+            <a:ext cx="365760" cy="0"/>
           </a:xfrm>
           <a:prstGeom prst="line">
             <a:avLst/>
           </a:prstGeom>
-          <a:ln w="25400">
+          <a:ln w="12700">
             <a:solidFill>
-              <a:srgbClr val="B02A2A"/>
+              <a:srgbClr val="00B4D8"/>
             </a:solidFill>
             <a:tailEnd type="triangle" w="med" len="med"/>
           </a:ln>
@@ -52781,14 +53367,14 @@
       </p:cxnSp>
       <p:sp>
         <p:nvSpPr>
-          <p:cNvPr id="9" name="Rounded Rectangle 8"/>
+          <p:cNvPr id="10" name="Rounded Rectangle 9"/>
           <p:cNvSpPr/>
           <p:nvPr/>
         </p:nvSpPr>
         <p:spPr>
           <a:xfrm>
-            <a:off x="1737360" y="4023360"/>
-            <a:ext cx="8714232" cy="1005840"/>
+            <a:off x="914400" y="4526280"/>
+            <a:ext cx="3291840" cy="822960"/>
           </a:xfrm>
           <a:prstGeom prst="roundRect">
             <a:avLst/>
@@ -52798,7 +53384,7 @@
           </a:solidFill>
           <a:ln w="15875">
             <a:solidFill>
-              <a:srgbClr val="2E7D32"/>
+              <a:srgbClr val="1B2A4A"/>
             </a:solidFill>
           </a:ln>
         </p:spPr>
@@ -52822,36 +53408,215 @@
           <a:p>
             <a:pPr algn="ctr"/>
             <a:r>
-              <a:rPr sz="1200" b="1" i="0">
-                <a:solidFill>
-                  <a:srgbClr val="2E7D32"/>
-                </a:solidFill>
-                <a:latin typeface="Calibri"/>
-              </a:rPr>
-              <a:t>DEFENSE: Disable anonymous bind; require authenticated LDAP</a:t>
+              <a:rPr sz="1050" b="0" i="0">
+                <a:solidFill>
+                  <a:srgbClr val="111B30"/>
+                </a:solidFill>
+                <a:latin typeface="Calibri"/>
+              </a:rPr>
+              <a:t>NetworkAdmins-L2</a:t>
+            </a:r>
+          </a:p>
+          <a:p>
+            <a:pPr algn="ctr"/>
+            <a:r>
+              <a:rPr sz="1050" b="0" i="0">
+                <a:solidFill>
+                  <a:srgbClr val="111B30"/>
+                </a:solidFill>
+                <a:latin typeface="Calibri"/>
+              </a:rPr>
+              <a:t>(help desk admins)</a:t>
+            </a:r>
+          </a:p>
+        </p:txBody>
+      </p:sp>
+      <p:sp>
+        <p:nvSpPr>
+          <p:cNvPr id="11" name="Rounded Rectangle 10"/>
+          <p:cNvSpPr/>
+          <p:nvPr/>
+        </p:nvSpPr>
+        <p:spPr>
+          <a:xfrm>
+            <a:off x="4572000" y="4526280"/>
+            <a:ext cx="3291840" cy="822960"/>
+          </a:xfrm>
+          <a:prstGeom prst="roundRect">
+            <a:avLst/>
+          </a:prstGeom>
+          <a:solidFill>
+            <a:srgbClr val="E8EEF7"/>
+          </a:solidFill>
+          <a:ln w="15875">
+            <a:solidFill>
+              <a:srgbClr val="3D5A80"/>
+            </a:solidFill>
+          </a:ln>
+        </p:spPr>
+        <p:style>
+          <a:lnRef idx="1">
+            <a:schemeClr val="accent1"/>
+          </a:lnRef>
+          <a:fillRef idx="3">
+            <a:schemeClr val="accent1"/>
+          </a:fillRef>
+          <a:effectRef idx="2">
+            <a:schemeClr val="accent1"/>
+          </a:effectRef>
+          <a:fontRef idx="minor">
+            <a:schemeClr val="lt1"/>
+          </a:fontRef>
+        </p:style>
+        <p:txBody>
+          <a:bodyPr rtlCol="0" anchor="ctr" wrap="square" lIns="38100" rIns="38100" tIns="12700" bIns="12700"/>
+          <a:lstStyle/>
+          <a:p>
+            <a:pPr algn="ctr"/>
+            <a:r>
+              <a:rPr sz="950" b="0" i="0">
+                <a:solidFill>
+                  <a:srgbClr val="111B30"/>
+                </a:solidFill>
+                <a:latin typeface="Calibri"/>
+              </a:rPr>
+              <a:t>Cisco-AVPair:</a:t>
+            </a:r>
+          </a:p>
+          <a:p>
+            <a:pPr algn="ctr"/>
+            <a:r>
+              <a:rPr sz="950" b="0" i="0">
+                <a:solidFill>
+                  <a:srgbClr val="111B30"/>
+                </a:solidFill>
+                <a:latin typeface="Calibri"/>
+              </a:rPr>
+              <a:t>shell:priv-lvl=5</a:t>
+            </a:r>
+          </a:p>
+        </p:txBody>
+      </p:sp>
+      <p:sp>
+        <p:nvSpPr>
+          <p:cNvPr id="12" name="Rounded Rectangle 11"/>
+          <p:cNvSpPr/>
+          <p:nvPr/>
+        </p:nvSpPr>
+        <p:spPr>
+          <a:xfrm>
+            <a:off x="8229600" y="4526280"/>
+            <a:ext cx="2743200" cy="822960"/>
+          </a:xfrm>
+          <a:prstGeom prst="roundRect">
+            <a:avLst/>
+          </a:prstGeom>
+          <a:solidFill>
+            <a:srgbClr val="E8EEF7"/>
+          </a:solidFill>
+          <a:ln w="15875">
+            <a:solidFill>
+              <a:srgbClr val="3D5A80"/>
+            </a:solidFill>
+          </a:ln>
+        </p:spPr>
+        <p:style>
+          <a:lnRef idx="1">
+            <a:schemeClr val="accent1"/>
+          </a:lnRef>
+          <a:fillRef idx="3">
+            <a:schemeClr val="accent1"/>
+          </a:fillRef>
+          <a:effectRef idx="2">
+            <a:schemeClr val="accent1"/>
+          </a:effectRef>
+          <a:fontRef idx="minor">
+            <a:schemeClr val="lt1"/>
+          </a:fontRef>
+        </p:style>
+        <p:txBody>
+          <a:bodyPr rtlCol="0" anchor="ctr" wrap="square" lIns="38100" rIns="38100" tIns="12700" bIns="12700"/>
+          <a:lstStyle/>
+          <a:p>
+            <a:pPr algn="ctr"/>
+            <a:r>
+              <a:rPr sz="1050" b="1" i="0">
+                <a:solidFill>
+                  <a:srgbClr val="1B2A4A"/>
+                </a:solidFill>
+                <a:latin typeface="Calibri"/>
+              </a:rPr>
+              <a:t>Limited exec</a:t>
+            </a:r>
+          </a:p>
+          <a:p>
+            <a:pPr algn="ctr"/>
+            <a:r>
+              <a:rPr sz="1050" b="1" i="0">
+                <a:solidFill>
+                  <a:srgbClr val="1B2A4A"/>
+                </a:solidFill>
+                <a:latin typeface="Calibri"/>
+              </a:rPr>
+              <a:t>commands only</a:t>
             </a:r>
           </a:p>
         </p:txBody>
       </p:sp>
       <p:cxnSp>
         <p:nvCxnSpPr>
-          <p:cNvPr id="10" name="Connector 9"/>
+          <p:cNvPr id="13" name="Connector 12"/>
           <p:cNvCxnSpPr/>
           <p:nvPr/>
         </p:nvCxnSpPr>
         <p:spPr>
-          <a:xfrm flipH="1">
-            <a:off x="6094475" y="3474720"/>
-            <a:ext cx="4573" cy="548640"/>
+          <a:xfrm>
+            <a:off x="4206240" y="4937760"/>
+            <a:ext cx="365760" cy="0"/>
           </a:xfrm>
           <a:prstGeom prst="line">
             <a:avLst/>
           </a:prstGeom>
-          <a:ln w="19050">
+          <a:ln w="12700">
             <a:solidFill>
-              <a:srgbClr val="2E7D32"/>
+              <a:srgbClr val="3D5A80"/>
             </a:solidFill>
-            <a:prstDash val="dash"/>
+            <a:tailEnd type="triangle" w="med" len="med"/>
+          </a:ln>
+        </p:spPr>
+        <p:style>
+          <a:lnRef idx="2">
+            <a:schemeClr val="accent1"/>
+          </a:lnRef>
+          <a:fillRef idx="0">
+            <a:schemeClr val="accent1"/>
+          </a:fillRef>
+          <a:effectRef idx="1">
+            <a:schemeClr val="accent1"/>
+          </a:effectRef>
+          <a:fontRef idx="minor">
+            <a:schemeClr val="tx1"/>
+          </a:fontRef>
+        </p:style>
+      </p:cxnSp>
+      <p:cxnSp>
+        <p:nvCxnSpPr>
+          <p:cNvPr id="14" name="Connector 13"/>
+          <p:cNvCxnSpPr/>
+          <p:nvPr/>
+        </p:nvCxnSpPr>
+        <p:spPr>
+          <a:xfrm>
+            <a:off x="7863840" y="4937760"/>
+            <a:ext cx="365760" cy="0"/>
+          </a:xfrm>
+          <a:prstGeom prst="line">
+            <a:avLst/>
+          </a:prstGeom>
+          <a:ln w="12700">
+            <a:solidFill>
+              <a:srgbClr val="3D5A80"/>
+            </a:solidFill>
             <a:tailEnd type="triangle" w="med" len="med"/>
           </a:ln>
         </p:spPr>
@@ -52926,7 +53691,7 @@
                 </a:solidFill>
                 <a:latin typeface="Cambria"/>
               </a:rPr>
-              <a:t>LDAP in Plaintext</a:t>
+              <a:t>LDAP Anonymous Bind</a:t>
             </a:r>
           </a:p>
         </p:txBody>
@@ -53014,7 +53779,7 @@
                 </a:solidFill>
                 <a:latin typeface="Calibri"/>
               </a:rPr>
-              <a:t>LDAP queries run over</a:t>
+              <a:t>LDAP server allows</a:t>
             </a:r>
           </a:p>
           <a:p>
@@ -53026,7 +53791,19 @@
                 </a:solidFill>
                 <a:latin typeface="Calibri"/>
               </a:rPr>
-              <a:t>an unencrypted connection</a:t>
+              <a:t>anonymous (unauthenticated)</a:t>
+            </a:r>
+          </a:p>
+          <a:p>
+            <a:pPr algn="ctr"/>
+            <a:r>
+              <a:rPr sz="1100" b="0" i="0">
+                <a:solidFill>
+                  <a:srgbClr val="111B30"/>
+                </a:solidFill>
+                <a:latin typeface="Calibri"/>
+              </a:rPr>
+              <a:t>binds</a:t>
             </a:r>
           </a:p>
         </p:txBody>
@@ -53080,7 +53857,7 @@
                 </a:solidFill>
                 <a:latin typeface="Calibri"/>
               </a:rPr>
-              <a:t>Attacker sniffs the wire</a:t>
+              <a:t>Attacker queries the</a:t>
             </a:r>
           </a:p>
           <a:p>
@@ -53092,7 +53869,7 @@
                 </a:solidFill>
                 <a:latin typeface="Calibri"/>
               </a:rPr>
-              <a:t>between client and</a:t>
+              <a:t>directory with no</a:t>
             </a:r>
           </a:p>
           <a:p>
@@ -53104,7 +53881,7 @@
                 </a:solidFill>
                 <a:latin typeface="Calibri"/>
               </a:rPr>
-              <a:t>directory server</a:t>
+              <a:t>credentials at all</a:t>
             </a:r>
           </a:p>
         </p:txBody>
@@ -53158,7 +53935,7 @@
                 </a:solidFill>
                 <a:latin typeface="Calibri"/>
               </a:rPr>
-              <a:t>Credentials and query</a:t>
+              <a:t>Directory structure and</a:t>
             </a:r>
           </a:p>
           <a:p>
@@ -53170,7 +53947,7 @@
                 </a:solidFill>
                 <a:latin typeface="Calibri"/>
               </a:rPr>
-              <a:t>data are captured</a:t>
+              <a:t>user data are exposed</a:t>
             </a:r>
           </a:p>
           <a:p>
@@ -53182,7 +53959,7 @@
                 </a:solidFill>
                 <a:latin typeface="Calibri"/>
               </a:rPr>
-              <a:t>in the clear</a:t>
+              <a:t>to anyone</a:t>
             </a:r>
           </a:p>
         </p:txBody>
@@ -53308,7 +54085,7 @@
                 </a:solidFill>
                 <a:latin typeface="Calibri"/>
               </a:rPr>
-              <a:t>DEFENSE: LDAPS (LDAP over TLS) instead of plain LDAP</a:t>
+              <a:t>DEFENSE: Disable anonymous bind; require authenticated LDAP</a:t>
             </a:r>
           </a:p>
         </p:txBody>
@@ -53406,7 +54183,7 @@
                 </a:solidFill>
                 <a:latin typeface="Cambria"/>
               </a:rPr>
-              <a:t>Weak/Shared RADIUS Secret</a:t>
+              <a:t>LDAP in Plaintext</a:t>
             </a:r>
           </a:p>
         </p:txBody>
@@ -53494,7 +54271,7 @@
                 </a:solidFill>
                 <a:latin typeface="Calibri"/>
               </a:rPr>
-              <a:t>The shared secret between</a:t>
+              <a:t>LDAP queries run over</a:t>
             </a:r>
           </a:p>
           <a:p>
@@ -53506,19 +54283,7 @@
                 </a:solidFill>
                 <a:latin typeface="Calibri"/>
               </a:rPr>
-              <a:t>a NAS and the RADIUS</a:t>
-            </a:r>
-          </a:p>
-          <a:p>
-            <a:pPr algn="ctr"/>
-            <a:r>
-              <a:rPr sz="1100" b="0" i="0">
-                <a:solidFill>
-                  <a:srgbClr val="111B30"/>
-                </a:solidFill>
-                <a:latin typeface="Calibri"/>
-              </a:rPr>
-              <a:t>server is weak or reused</a:t>
+              <a:t>an unencrypted connection</a:t>
             </a:r>
           </a:p>
         </p:txBody>
@@ -53572,7 +54337,7 @@
                 </a:solidFill>
                 <a:latin typeface="Calibri"/>
               </a:rPr>
-              <a:t>Attacker obtains or</a:t>
+              <a:t>Attacker sniffs the wire</a:t>
             </a:r>
           </a:p>
           <a:p>
@@ -53584,7 +54349,19 @@
                 </a:solidFill>
                 <a:latin typeface="Calibri"/>
               </a:rPr>
-              <a:t>guesses that secret</a:t>
+              <a:t>between client and</a:t>
+            </a:r>
+          </a:p>
+          <a:p>
+            <a:pPr algn="ctr"/>
+            <a:r>
+              <a:rPr sz="1100" b="1" i="0">
+                <a:solidFill>
+                  <a:srgbClr val="111B30"/>
+                </a:solidFill>
+                <a:latin typeface="Calibri"/>
+              </a:rPr>
+              <a:t>directory server</a:t>
             </a:r>
           </a:p>
         </p:txBody>
@@ -53638,7 +54415,7 @@
                 </a:solidFill>
                 <a:latin typeface="Calibri"/>
               </a:rPr>
-              <a:t>Attacker can impersonate</a:t>
+              <a:t>Credentials and query</a:t>
             </a:r>
           </a:p>
           <a:p>
@@ -53650,7 +54427,7 @@
                 </a:solidFill>
                 <a:latin typeface="Calibri"/>
               </a:rPr>
-              <a:t>a trusted NAS or decode</a:t>
+              <a:t>data are captured</a:t>
             </a:r>
           </a:p>
           <a:p>
@@ -53662,7 +54439,7 @@
                 </a:solidFill>
                 <a:latin typeface="Calibri"/>
               </a:rPr>
-              <a:t>RADIUS traffic</a:t>
+              <a:t>in the clear</a:t>
             </a:r>
           </a:p>
         </p:txBody>
@@ -53788,7 +54565,7 @@
                 </a:solidFill>
                 <a:latin typeface="Calibri"/>
               </a:rPr>
-              <a:t>DEFENSE: Strong unique shared secrets per NAS; rotate periodically</a:t>
+              <a:t>DEFENSE: LDAPS (LDAP over TLS) instead of plain LDAP</a:t>
             </a:r>
           </a:p>
         </p:txBody>
@@ -53886,7 +54663,7 @@
                 </a:solidFill>
                 <a:latin typeface="Cambria"/>
               </a:rPr>
-              <a:t>Legacy RADIUS Auth (PAP over UDP)</a:t>
+              <a:t>Weak/Shared RADIUS Secret</a:t>
             </a:r>
           </a:p>
         </p:txBody>
@@ -53974,7 +54751,7 @@
                 </a:solidFill>
                 <a:latin typeface="Calibri"/>
               </a:rPr>
-              <a:t>RADIUS itself runs over</a:t>
+              <a:t>The shared secret between</a:t>
             </a:r>
           </a:p>
           <a:p>
@@ -53986,7 +54763,7 @@
                 </a:solidFill>
                 <a:latin typeface="Calibri"/>
               </a:rPr>
-              <a:t>UDP with comparatively</a:t>
+              <a:t>a NAS and the RADIUS</a:t>
             </a:r>
           </a:p>
           <a:p>
@@ -53998,7 +54775,7 @@
                 </a:solidFill>
                 <a:latin typeface="Calibri"/>
               </a:rPr>
-              <a:t>weak legacy auth options</a:t>
+              <a:t>server is weak or reused</a:t>
             </a:r>
           </a:p>
         </p:txBody>
@@ -54052,7 +54829,7 @@
                 </a:solidFill>
                 <a:latin typeface="Calibri"/>
               </a:rPr>
-              <a:t>Attacker on-path intercepts</a:t>
+              <a:t>Attacker obtains or</a:t>
             </a:r>
           </a:p>
           <a:p>
@@ -54064,19 +54841,7 @@
                 </a:solidFill>
                 <a:latin typeface="Calibri"/>
               </a:rPr>
-              <a:t>or manipulates that</a:t>
-            </a:r>
-          </a:p>
-          <a:p>
-            <a:pPr algn="ctr"/>
-            <a:r>
-              <a:rPr sz="1100" b="1" i="0">
-                <a:solidFill>
-                  <a:srgbClr val="111B30"/>
-                </a:solidFill>
-                <a:latin typeface="Calibri"/>
-              </a:rPr>
-              <a:t>UDP traffic</a:t>
+              <a:t>guesses that secret</a:t>
             </a:r>
           </a:p>
         </p:txBody>
@@ -54130,7 +54895,7 @@
                 </a:solidFill>
                 <a:latin typeface="Calibri"/>
               </a:rPr>
-              <a:t>Weaker authentication</a:t>
+              <a:t>Attacker can impersonate</a:t>
             </a:r>
           </a:p>
           <a:p>
@@ -54142,7 +54907,7 @@
                 </a:solidFill>
                 <a:latin typeface="Calibri"/>
               </a:rPr>
-              <a:t>methods are easier</a:t>
+              <a:t>a trusted NAS or decode</a:t>
             </a:r>
           </a:p>
           <a:p>
@@ -54154,7 +54919,7 @@
                 </a:solidFill>
                 <a:latin typeface="Calibri"/>
               </a:rPr>
-              <a:t>to attack or spoof</a:t>
+              <a:t>RADIUS traffic</a:t>
             </a:r>
           </a:p>
         </p:txBody>
@@ -54280,7 +55045,7 @@
                 </a:solidFill>
                 <a:latin typeface="Calibri"/>
               </a:rPr>
-              <a:t>DEFENSE: Prefer MSCHAPv2/EAP; consider RadSec (RADIUS over TLS)</a:t>
+              <a:t>DEFENSE: Strong unique shared secrets per NAS; rotate periodically</a:t>
             </a:r>
           </a:p>
         </p:txBody>
@@ -54336,6 +55101,498 @@
     <p:bg>
       <p:bgPr>
         <a:solidFill>
+          <a:srgbClr val="FFFFFF"/>
+        </a:solidFill>
+        <a:effectLst/>
+      </p:bgPr>
+    </p:bg>
+    <p:spTree>
+      <p:nvGrpSpPr>
+        <p:cNvPr id="1" name=""/>
+        <p:cNvGrpSpPr/>
+        <p:nvPr/>
+      </p:nvGrpSpPr>
+      <p:grpSpPr/>
+      <p:sp>
+        <p:nvSpPr>
+          <p:cNvPr id="2" name="TextBox 1"/>
+          <p:cNvSpPr txBox="1"/>
+          <p:nvPr/>
+        </p:nvSpPr>
+        <p:spPr>
+          <a:xfrm>
+            <a:off x="640080" y="457200"/>
+            <a:ext cx="10911535" cy="777240"/>
+          </a:xfrm>
+          <a:prstGeom prst="rect">
+            <a:avLst/>
+          </a:prstGeom>
+          <a:noFill/>
+        </p:spPr>
+        <p:txBody>
+          <a:bodyPr wrap="square" lIns="0" tIns="0">
+            <a:spAutoFit/>
+          </a:bodyPr>
+          <a:lstStyle/>
+          <a:p>
+            <a:pPr algn="l"/>
+            <a:r>
+              <a:rPr sz="2900" b="1" i="0">
+                <a:solidFill>
+                  <a:srgbClr val="1B2A4A"/>
+                </a:solidFill>
+                <a:latin typeface="Cambria"/>
+              </a:rPr>
+              <a:t>Legacy RADIUS Auth (PAP over UDP)</a:t>
+            </a:r>
+          </a:p>
+        </p:txBody>
+      </p:sp>
+      <p:sp>
+        <p:nvSpPr>
+          <p:cNvPr id="3" name="TextBox 2"/>
+          <p:cNvSpPr txBox="1"/>
+          <p:nvPr/>
+        </p:nvSpPr>
+        <p:spPr>
+          <a:xfrm>
+            <a:off x="640080" y="1243584"/>
+            <a:ext cx="10911535" cy="411480"/>
+          </a:xfrm>
+          <a:prstGeom prst="rect">
+            <a:avLst/>
+          </a:prstGeom>
+          <a:noFill/>
+        </p:spPr>
+        <p:txBody>
+          <a:bodyPr wrap="square" lIns="0" tIns="0">
+            <a:spAutoFit/>
+          </a:bodyPr>
+          <a:lstStyle/>
+          <a:p>
+            <a:r>
+              <a:rPr sz="1350" b="0" i="1">
+                <a:solidFill>
+                  <a:srgbClr val="B02A2A"/>
+                </a:solidFill>
+                <a:latin typeface="Calibri"/>
+              </a:rPr>
+              <a:t>Attack Spotlight</a:t>
+            </a:r>
+          </a:p>
+        </p:txBody>
+      </p:sp>
+      <p:sp>
+        <p:nvSpPr>
+          <p:cNvPr id="4" name="Rounded Rectangle 3"/>
+          <p:cNvSpPr/>
+          <p:nvPr/>
+        </p:nvSpPr>
+        <p:spPr>
+          <a:xfrm>
+            <a:off x="822960" y="2286000"/>
+            <a:ext cx="3108960" cy="1188720"/>
+          </a:xfrm>
+          <a:prstGeom prst="roundRect">
+            <a:avLst/>
+          </a:prstGeom>
+          <a:solidFill>
+            <a:srgbClr val="E8EEF7"/>
+          </a:solidFill>
+          <a:ln w="15875">
+            <a:solidFill>
+              <a:srgbClr val="B02A2A"/>
+            </a:solidFill>
+          </a:ln>
+        </p:spPr>
+        <p:style>
+          <a:lnRef idx="1">
+            <a:schemeClr val="accent1"/>
+          </a:lnRef>
+          <a:fillRef idx="3">
+            <a:schemeClr val="accent1"/>
+          </a:fillRef>
+          <a:effectRef idx="2">
+            <a:schemeClr val="accent1"/>
+          </a:effectRef>
+          <a:fontRef idx="minor">
+            <a:schemeClr val="lt1"/>
+          </a:fontRef>
+        </p:style>
+        <p:txBody>
+          <a:bodyPr rtlCol="0" anchor="ctr" wrap="square" lIns="38100" rIns="38100" tIns="12700" bIns="12700"/>
+          <a:lstStyle/>
+          <a:p>
+            <a:pPr algn="ctr"/>
+            <a:r>
+              <a:rPr sz="1100" b="0" i="0">
+                <a:solidFill>
+                  <a:srgbClr val="111B30"/>
+                </a:solidFill>
+                <a:latin typeface="Calibri"/>
+              </a:rPr>
+              <a:t>RADIUS itself runs over</a:t>
+            </a:r>
+          </a:p>
+          <a:p>
+            <a:pPr algn="ctr"/>
+            <a:r>
+              <a:rPr sz="1100" b="0" i="0">
+                <a:solidFill>
+                  <a:srgbClr val="111B30"/>
+                </a:solidFill>
+                <a:latin typeface="Calibri"/>
+              </a:rPr>
+              <a:t>UDP with comparatively</a:t>
+            </a:r>
+          </a:p>
+          <a:p>
+            <a:pPr algn="ctr"/>
+            <a:r>
+              <a:rPr sz="1100" b="0" i="0">
+                <a:solidFill>
+                  <a:srgbClr val="111B30"/>
+                </a:solidFill>
+                <a:latin typeface="Calibri"/>
+              </a:rPr>
+              <a:t>weak legacy auth options</a:t>
+            </a:r>
+          </a:p>
+        </p:txBody>
+      </p:sp>
+      <p:sp>
+        <p:nvSpPr>
+          <p:cNvPr id="5" name="Rounded Rectangle 4"/>
+          <p:cNvSpPr/>
+          <p:nvPr/>
+        </p:nvSpPr>
+        <p:spPr>
+          <a:xfrm>
+            <a:off x="4544568" y="2286000"/>
+            <a:ext cx="3108960" cy="1188720"/>
+          </a:xfrm>
+          <a:prstGeom prst="roundRect">
+            <a:avLst/>
+          </a:prstGeom>
+          <a:solidFill>
+            <a:srgbClr val="FFFFFF"/>
+          </a:solidFill>
+          <a:ln w="15875">
+            <a:solidFill>
+              <a:srgbClr val="B02A2A"/>
+            </a:solidFill>
+          </a:ln>
+        </p:spPr>
+        <p:style>
+          <a:lnRef idx="1">
+            <a:schemeClr val="accent1"/>
+          </a:lnRef>
+          <a:fillRef idx="3">
+            <a:schemeClr val="accent1"/>
+          </a:fillRef>
+          <a:effectRef idx="2">
+            <a:schemeClr val="accent1"/>
+          </a:effectRef>
+          <a:fontRef idx="minor">
+            <a:schemeClr val="lt1"/>
+          </a:fontRef>
+        </p:style>
+        <p:txBody>
+          <a:bodyPr rtlCol="0" anchor="ctr" wrap="square" lIns="38100" rIns="38100" tIns="12700" bIns="12700"/>
+          <a:lstStyle/>
+          <a:p>
+            <a:pPr algn="ctr"/>
+            <a:r>
+              <a:rPr sz="1100" b="1" i="0">
+                <a:solidFill>
+                  <a:srgbClr val="111B30"/>
+                </a:solidFill>
+                <a:latin typeface="Calibri"/>
+              </a:rPr>
+              <a:t>Attacker on-path intercepts</a:t>
+            </a:r>
+          </a:p>
+          <a:p>
+            <a:pPr algn="ctr"/>
+            <a:r>
+              <a:rPr sz="1100" b="1" i="0">
+                <a:solidFill>
+                  <a:srgbClr val="111B30"/>
+                </a:solidFill>
+                <a:latin typeface="Calibri"/>
+              </a:rPr>
+              <a:t>or manipulates that</a:t>
+            </a:r>
+          </a:p>
+          <a:p>
+            <a:pPr algn="ctr"/>
+            <a:r>
+              <a:rPr sz="1100" b="1" i="0">
+                <a:solidFill>
+                  <a:srgbClr val="111B30"/>
+                </a:solidFill>
+                <a:latin typeface="Calibri"/>
+              </a:rPr>
+              <a:t>UDP traffic</a:t>
+            </a:r>
+          </a:p>
+        </p:txBody>
+      </p:sp>
+      <p:sp>
+        <p:nvSpPr>
+          <p:cNvPr id="6" name="Rounded Rectangle 5"/>
+          <p:cNvSpPr/>
+          <p:nvPr/>
+        </p:nvSpPr>
+        <p:spPr>
+          <a:xfrm>
+            <a:off x="8266175" y="2286000"/>
+            <a:ext cx="3108960" cy="1188720"/>
+          </a:xfrm>
+          <a:prstGeom prst="roundRect">
+            <a:avLst/>
+          </a:prstGeom>
+          <a:solidFill>
+            <a:srgbClr val="E8EEF7"/>
+          </a:solidFill>
+          <a:ln w="15875">
+            <a:solidFill>
+              <a:srgbClr val="B02A2A"/>
+            </a:solidFill>
+          </a:ln>
+        </p:spPr>
+        <p:style>
+          <a:lnRef idx="1">
+            <a:schemeClr val="accent1"/>
+          </a:lnRef>
+          <a:fillRef idx="3">
+            <a:schemeClr val="accent1"/>
+          </a:fillRef>
+          <a:effectRef idx="2">
+            <a:schemeClr val="accent1"/>
+          </a:effectRef>
+          <a:fontRef idx="minor">
+            <a:schemeClr val="lt1"/>
+          </a:fontRef>
+        </p:style>
+        <p:txBody>
+          <a:bodyPr rtlCol="0" anchor="ctr" wrap="square" lIns="38100" rIns="38100" tIns="12700" bIns="12700"/>
+          <a:lstStyle/>
+          <a:p>
+            <a:pPr algn="ctr"/>
+            <a:r>
+              <a:rPr sz="1100" b="0" i="0">
+                <a:solidFill>
+                  <a:srgbClr val="111B30"/>
+                </a:solidFill>
+                <a:latin typeface="Calibri"/>
+              </a:rPr>
+              <a:t>Weaker authentication</a:t>
+            </a:r>
+          </a:p>
+          <a:p>
+            <a:pPr algn="ctr"/>
+            <a:r>
+              <a:rPr sz="1100" b="0" i="0">
+                <a:solidFill>
+                  <a:srgbClr val="111B30"/>
+                </a:solidFill>
+                <a:latin typeface="Calibri"/>
+              </a:rPr>
+              <a:t>methods are easier</a:t>
+            </a:r>
+          </a:p>
+          <a:p>
+            <a:pPr algn="ctr"/>
+            <a:r>
+              <a:rPr sz="1100" b="0" i="0">
+                <a:solidFill>
+                  <a:srgbClr val="111B30"/>
+                </a:solidFill>
+                <a:latin typeface="Calibri"/>
+              </a:rPr>
+              <a:t>to attack or spoof</a:t>
+            </a:r>
+          </a:p>
+        </p:txBody>
+      </p:sp>
+      <p:cxnSp>
+        <p:nvCxnSpPr>
+          <p:cNvPr id="7" name="Connector 6"/>
+          <p:cNvCxnSpPr/>
+          <p:nvPr/>
+        </p:nvCxnSpPr>
+        <p:spPr>
+          <a:xfrm>
+            <a:off x="3931920" y="2880360"/>
+            <a:ext cx="612648" cy="0"/>
+          </a:xfrm>
+          <a:prstGeom prst="line">
+            <a:avLst/>
+          </a:prstGeom>
+          <a:ln w="25400">
+            <a:solidFill>
+              <a:srgbClr val="B02A2A"/>
+            </a:solidFill>
+            <a:tailEnd type="triangle" w="med" len="med"/>
+          </a:ln>
+        </p:spPr>
+        <p:style>
+          <a:lnRef idx="2">
+            <a:schemeClr val="accent1"/>
+          </a:lnRef>
+          <a:fillRef idx="0">
+            <a:schemeClr val="accent1"/>
+          </a:fillRef>
+          <a:effectRef idx="1">
+            <a:schemeClr val="accent1"/>
+          </a:effectRef>
+          <a:fontRef idx="minor">
+            <a:schemeClr val="tx1"/>
+          </a:fontRef>
+        </p:style>
+      </p:cxnSp>
+      <p:cxnSp>
+        <p:nvCxnSpPr>
+          <p:cNvPr id="8" name="Connector 7"/>
+          <p:cNvCxnSpPr/>
+          <p:nvPr/>
+        </p:nvCxnSpPr>
+        <p:spPr>
+          <a:xfrm>
+            <a:off x="7653527" y="2880360"/>
+            <a:ext cx="612648" cy="0"/>
+          </a:xfrm>
+          <a:prstGeom prst="line">
+            <a:avLst/>
+          </a:prstGeom>
+          <a:ln w="25400">
+            <a:solidFill>
+              <a:srgbClr val="B02A2A"/>
+            </a:solidFill>
+            <a:tailEnd type="triangle" w="med" len="med"/>
+          </a:ln>
+        </p:spPr>
+        <p:style>
+          <a:lnRef idx="2">
+            <a:schemeClr val="accent1"/>
+          </a:lnRef>
+          <a:fillRef idx="0">
+            <a:schemeClr val="accent1"/>
+          </a:fillRef>
+          <a:effectRef idx="1">
+            <a:schemeClr val="accent1"/>
+          </a:effectRef>
+          <a:fontRef idx="minor">
+            <a:schemeClr val="tx1"/>
+          </a:fontRef>
+        </p:style>
+      </p:cxnSp>
+      <p:sp>
+        <p:nvSpPr>
+          <p:cNvPr id="9" name="Rounded Rectangle 8"/>
+          <p:cNvSpPr/>
+          <p:nvPr/>
+        </p:nvSpPr>
+        <p:spPr>
+          <a:xfrm>
+            <a:off x="1737360" y="4023360"/>
+            <a:ext cx="8714232" cy="1005840"/>
+          </a:xfrm>
+          <a:prstGeom prst="roundRect">
+            <a:avLst/>
+          </a:prstGeom>
+          <a:solidFill>
+            <a:srgbClr val="E8EEF7"/>
+          </a:solidFill>
+          <a:ln w="15875">
+            <a:solidFill>
+              <a:srgbClr val="2E7D32"/>
+            </a:solidFill>
+          </a:ln>
+        </p:spPr>
+        <p:style>
+          <a:lnRef idx="1">
+            <a:schemeClr val="accent1"/>
+          </a:lnRef>
+          <a:fillRef idx="3">
+            <a:schemeClr val="accent1"/>
+          </a:fillRef>
+          <a:effectRef idx="2">
+            <a:schemeClr val="accent1"/>
+          </a:effectRef>
+          <a:fontRef idx="minor">
+            <a:schemeClr val="lt1"/>
+          </a:fontRef>
+        </p:style>
+        <p:txBody>
+          <a:bodyPr rtlCol="0" anchor="ctr" wrap="square" lIns="38100" rIns="38100" tIns="12700" bIns="12700"/>
+          <a:lstStyle/>
+          <a:p>
+            <a:pPr algn="ctr"/>
+            <a:r>
+              <a:rPr sz="1200" b="1" i="0">
+                <a:solidFill>
+                  <a:srgbClr val="2E7D32"/>
+                </a:solidFill>
+                <a:latin typeface="Calibri"/>
+              </a:rPr>
+              <a:t>DEFENSE: Prefer MSCHAPv2/EAP; consider RadSec (RADIUS over TLS)</a:t>
+            </a:r>
+          </a:p>
+        </p:txBody>
+      </p:sp>
+      <p:cxnSp>
+        <p:nvCxnSpPr>
+          <p:cNvPr id="10" name="Connector 9"/>
+          <p:cNvCxnSpPr/>
+          <p:nvPr/>
+        </p:nvCxnSpPr>
+        <p:spPr>
+          <a:xfrm flipH="1">
+            <a:off x="6094475" y="3474720"/>
+            <a:ext cx="4573" cy="548640"/>
+          </a:xfrm>
+          <a:prstGeom prst="line">
+            <a:avLst/>
+          </a:prstGeom>
+          <a:ln w="19050">
+            <a:solidFill>
+              <a:srgbClr val="2E7D32"/>
+            </a:solidFill>
+            <a:prstDash val="dash"/>
+            <a:tailEnd type="triangle" w="med" len="med"/>
+          </a:ln>
+        </p:spPr>
+        <p:style>
+          <a:lnRef idx="2">
+            <a:schemeClr val="accent1"/>
+          </a:lnRef>
+          <a:fillRef idx="0">
+            <a:schemeClr val="accent1"/>
+          </a:fillRef>
+          <a:effectRef idx="1">
+            <a:schemeClr val="accent1"/>
+          </a:effectRef>
+          <a:fontRef idx="minor">
+            <a:schemeClr val="tx1"/>
+          </a:fontRef>
+        </p:style>
+      </p:cxnSp>
+    </p:spTree>
+  </p:cSld>
+  <p:clrMapOvr>
+    <a:masterClrMapping/>
+  </p:clrMapOvr>
+</p:sld>
+</file>
+
+<file path=ppt/slides/slide95.xml><?xml version="1.0" encoding="utf-8"?>
+<p:sld xmlns:a="http://schemas.openxmlformats.org/drawingml/2006/main" xmlns:p="http://schemas.openxmlformats.org/presentationml/2006/main" xmlns:r="http://schemas.openxmlformats.org/officeDocument/2006/relationships">
+  <p:cSld>
+    <p:bg>
+      <p:bgPr>
+        <a:solidFill>
           <a:srgbClr val="1B2A4A"/>
         </a:solidFill>
         <a:effectLst/>
@@ -54444,7 +55701,7 @@
 </p:sld>
 </file>
 
-<file path=ppt/slides/slide95.xml><?xml version="1.0" encoding="utf-8"?>
+<file path=ppt/slides/slide96.xml><?xml version="1.0" encoding="utf-8"?>
 <p:sld xmlns:a="http://schemas.openxmlformats.org/drawingml/2006/main" xmlns:p="http://schemas.openxmlformats.org/presentationml/2006/main" xmlns:r="http://schemas.openxmlformats.org/officeDocument/2006/relationships">
   <p:cSld>
     <p:bg>
@@ -54592,7 +55849,7 @@
 </p:sld>
 </file>
 
-<file path=ppt/slides/slide96.xml><?xml version="1.0" encoding="utf-8"?>
+<file path=ppt/slides/slide97.xml><?xml version="1.0" encoding="utf-8"?>
 <p:sld xmlns:a="http://schemas.openxmlformats.org/drawingml/2006/main" xmlns:p="http://schemas.openxmlformats.org/presentationml/2006/main" xmlns:r="http://schemas.openxmlformats.org/officeDocument/2006/relationships">
   <p:cSld>
     <p:bg>
@@ -55035,684 +56292,6 @@
 </p:sld>
 </file>
 
-<file path=ppt/slides/slide97.xml><?xml version="1.0" encoding="utf-8"?>
-<p:sld xmlns:a="http://schemas.openxmlformats.org/drawingml/2006/main" xmlns:p="http://schemas.openxmlformats.org/presentationml/2006/main" xmlns:r="http://schemas.openxmlformats.org/officeDocument/2006/relationships">
-  <p:cSld>
-    <p:bg>
-      <p:bgPr>
-        <a:solidFill>
-          <a:srgbClr val="FFFFFF"/>
-        </a:solidFill>
-        <a:effectLst/>
-      </p:bgPr>
-    </p:bg>
-    <p:spTree>
-      <p:nvGrpSpPr>
-        <p:cNvPr id="1" name=""/>
-        <p:cNvGrpSpPr/>
-        <p:nvPr/>
-      </p:nvGrpSpPr>
-      <p:grpSpPr/>
-      <p:sp>
-        <p:nvSpPr>
-          <p:cNvPr id="2" name="TextBox 1"/>
-          <p:cNvSpPr txBox="1"/>
-          <p:nvPr/>
-        </p:nvSpPr>
-        <p:spPr>
-          <a:xfrm>
-            <a:off x="640080" y="457200"/>
-            <a:ext cx="10911535" cy="777240"/>
-          </a:xfrm>
-          <a:prstGeom prst="rect">
-            <a:avLst/>
-          </a:prstGeom>
-          <a:noFill/>
-        </p:spPr>
-        <p:txBody>
-          <a:bodyPr wrap="square" lIns="0" tIns="0">
-            <a:spAutoFit/>
-          </a:bodyPr>
-          <a:lstStyle/>
-          <a:p>
-            <a:pPr algn="l"/>
-            <a:r>
-              <a:rPr sz="2900" b="1" i="0">
-                <a:solidFill>
-                  <a:srgbClr val="1B2A4A"/>
-                </a:solidFill>
-                <a:latin typeface="Cambria"/>
-              </a:rPr>
-              <a:t>Quarantine OU &amp; Staged Remediation Workflow</a:t>
-            </a:r>
-          </a:p>
-        </p:txBody>
-      </p:sp>
-      <p:sp>
-        <p:nvSpPr>
-          <p:cNvPr id="3" name="TextBox 2"/>
-          <p:cNvSpPr txBox="1"/>
-          <p:nvPr/>
-        </p:nvSpPr>
-        <p:spPr>
-          <a:xfrm>
-            <a:off x="640080" y="1243584"/>
-            <a:ext cx="10911535" cy="411480"/>
-          </a:xfrm>
-          <a:prstGeom prst="rect">
-            <a:avLst/>
-          </a:prstGeom>
-          <a:noFill/>
-        </p:spPr>
-        <p:txBody>
-          <a:bodyPr wrap="square" lIns="0" tIns="0">
-            <a:spAutoFit/>
-          </a:bodyPr>
-          <a:lstStyle/>
-          <a:p>
-            <a:r>
-              <a:rPr sz="1350" b="0" i="1">
-                <a:solidFill>
-                  <a:srgbClr val="3D5A80"/>
-                </a:solidFill>
-                <a:latin typeface="Calibri"/>
-              </a:rPr>
-              <a:t>A staged manual remediation sequence for accounts a sweep flags - the same OU=Disabled quarantine previewed in Section 01.</a:t>
-            </a:r>
-          </a:p>
-        </p:txBody>
-      </p:sp>
-      <p:sp>
-        <p:nvSpPr>
-          <p:cNvPr id="4" name="Rounded Rectangle 3"/>
-          <p:cNvSpPr/>
-          <p:nvPr/>
-        </p:nvSpPr>
-        <p:spPr>
-          <a:xfrm>
-            <a:off x="914400" y="2103120"/>
-            <a:ext cx="2286000" cy="1234440"/>
-          </a:xfrm>
-          <a:prstGeom prst="roundRect">
-            <a:avLst/>
-          </a:prstGeom>
-          <a:solidFill>
-            <a:srgbClr val="E8EEF7"/>
-          </a:solidFill>
-          <a:ln w="15875">
-            <a:solidFill>
-              <a:srgbClr val="1B2A4A"/>
-            </a:solidFill>
-          </a:ln>
-        </p:spPr>
-        <p:style>
-          <a:lnRef idx="1">
-            <a:schemeClr val="accent1"/>
-          </a:lnRef>
-          <a:fillRef idx="3">
-            <a:schemeClr val="accent1"/>
-          </a:fillRef>
-          <a:effectRef idx="2">
-            <a:schemeClr val="accent1"/>
-          </a:effectRef>
-          <a:fontRef idx="minor">
-            <a:schemeClr val="lt1"/>
-          </a:fontRef>
-        </p:style>
-        <p:txBody>
-          <a:bodyPr rtlCol="0" anchor="ctr" wrap="square" lIns="38100" rIns="38100" tIns="12700" bIns="12700"/>
-          <a:lstStyle/>
-          <a:p>
-            <a:pPr algn="ctr"/>
-            <a:r>
-              <a:rPr sz="850" b="0" i="0">
-                <a:solidFill>
-                  <a:srgbClr val="111B30"/>
-                </a:solidFill>
-                <a:latin typeface="Calibri"/>
-              </a:rPr>
-              <a:t>1. Disable the</a:t>
-            </a:r>
-          </a:p>
-          <a:p>
-            <a:pPr algn="ctr"/>
-            <a:r>
-              <a:rPr sz="850" b="0" i="0">
-                <a:solidFill>
-                  <a:srgbClr val="111B30"/>
-                </a:solidFill>
-                <a:latin typeface="Calibri"/>
-              </a:rPr>
-              <a:t>account</a:t>
-            </a:r>
-          </a:p>
-          <a:p>
-            <a:pPr algn="ctr"/>
-            <a:r>
-              <a:rPr sz="850" b="0" i="0">
-                <a:solidFill>
-                  <a:srgbClr val="111B30"/>
-                </a:solidFill>
-                <a:latin typeface="Calibri"/>
-              </a:rPr>
-              <a:t>(Set-ADUser</a:t>
-            </a:r>
-          </a:p>
-          <a:p>
-            <a:pPr algn="ctr"/>
-            <a:r>
-              <a:rPr sz="850" b="0" i="0">
-                <a:solidFill>
-                  <a:srgbClr val="111B30"/>
-                </a:solidFill>
-                <a:latin typeface="Calibri"/>
-              </a:rPr>
-              <a:t>-Enabled $false)</a:t>
-            </a:r>
-          </a:p>
-        </p:txBody>
-      </p:sp>
-      <p:sp>
-        <p:nvSpPr>
-          <p:cNvPr id="5" name="Rounded Rectangle 4"/>
-          <p:cNvSpPr/>
-          <p:nvPr/>
-        </p:nvSpPr>
-        <p:spPr>
-          <a:xfrm>
-            <a:off x="3596335" y="2103120"/>
-            <a:ext cx="2286000" cy="1234440"/>
-          </a:xfrm>
-          <a:prstGeom prst="roundRect">
-            <a:avLst/>
-          </a:prstGeom>
-          <a:solidFill>
-            <a:srgbClr val="E8EEF7"/>
-          </a:solidFill>
-          <a:ln w="15875">
-            <a:solidFill>
-              <a:srgbClr val="1B2A4A"/>
-            </a:solidFill>
-          </a:ln>
-        </p:spPr>
-        <p:style>
-          <a:lnRef idx="1">
-            <a:schemeClr val="accent1"/>
-          </a:lnRef>
-          <a:fillRef idx="3">
-            <a:schemeClr val="accent1"/>
-          </a:fillRef>
-          <a:effectRef idx="2">
-            <a:schemeClr val="accent1"/>
-          </a:effectRef>
-          <a:fontRef idx="minor">
-            <a:schemeClr val="lt1"/>
-          </a:fontRef>
-        </p:style>
-        <p:txBody>
-          <a:bodyPr rtlCol="0" anchor="ctr" wrap="square" lIns="38100" rIns="38100" tIns="12700" bIns="12700"/>
-          <a:lstStyle/>
-          <a:p>
-            <a:pPr algn="ctr"/>
-            <a:r>
-              <a:rPr sz="800" b="0" i="0">
-                <a:solidFill>
-                  <a:srgbClr val="111B30"/>
-                </a:solidFill>
-                <a:latin typeface="Calibri"/>
-              </a:rPr>
-              <a:t>2. Set Description:</a:t>
-            </a:r>
-          </a:p>
-          <a:p>
-            <a:pPr algn="ctr"/>
-            <a:r>
-              <a:rPr sz="800" b="0" i="0">
-                <a:solidFill>
-                  <a:srgbClr val="111B30"/>
-                </a:solidFill>
-                <a:latin typeface="Calibri"/>
-              </a:rPr>
-              <a:t>[DISABLED] Manual</a:t>
-            </a:r>
-          </a:p>
-          <a:p>
-            <a:pPr algn="ctr"/>
-            <a:r>
-              <a:rPr sz="800" b="0" i="0">
-                <a:solidFill>
-                  <a:srgbClr val="111B30"/>
-                </a:solidFill>
-                <a:latin typeface="Calibri"/>
-              </a:rPr>
-              <a:t>review - stale &gt;Nd.</a:t>
-            </a:r>
-          </a:p>
-          <a:p>
-            <a:pPr algn="ctr"/>
-            <a:r>
-              <a:rPr sz="800" b="0" i="0">
-                <a:solidFill>
-                  <a:srgbClr val="111B30"/>
-                </a:solidFill>
-                <a:latin typeface="Calibri"/>
-              </a:rPr>
-              <a:t>Disabled by/on...</a:t>
-            </a:r>
-          </a:p>
-        </p:txBody>
-      </p:sp>
-      <p:sp>
-        <p:nvSpPr>
-          <p:cNvPr id="6" name="Rounded Rectangle 5"/>
-          <p:cNvSpPr/>
-          <p:nvPr/>
-        </p:nvSpPr>
-        <p:spPr>
-          <a:xfrm>
-            <a:off x="6278270" y="2103120"/>
-            <a:ext cx="2286000" cy="1234440"/>
-          </a:xfrm>
-          <a:prstGeom prst="roundRect">
-            <a:avLst/>
-          </a:prstGeom>
-          <a:solidFill>
-            <a:srgbClr val="E8EEF7"/>
-          </a:solidFill>
-          <a:ln w="15875">
-            <a:solidFill>
-              <a:srgbClr val="00B4D8"/>
-            </a:solidFill>
-          </a:ln>
-        </p:spPr>
-        <p:style>
-          <a:lnRef idx="1">
-            <a:schemeClr val="accent1"/>
-          </a:lnRef>
-          <a:fillRef idx="3">
-            <a:schemeClr val="accent1"/>
-          </a:fillRef>
-          <a:effectRef idx="2">
-            <a:schemeClr val="accent1"/>
-          </a:effectRef>
-          <a:fontRef idx="minor">
-            <a:schemeClr val="lt1"/>
-          </a:fontRef>
-        </p:style>
-        <p:txBody>
-          <a:bodyPr rtlCol="0" anchor="ctr" wrap="square" lIns="38100" rIns="38100" tIns="12700" bIns="12700"/>
-          <a:lstStyle/>
-          <a:p>
-            <a:pPr algn="ctr"/>
-            <a:r>
-              <a:rPr sz="850" b="1" i="0">
-                <a:solidFill>
-                  <a:srgbClr val="111B30"/>
-                </a:solidFill>
-                <a:latin typeface="Calibri"/>
-              </a:rPr>
-              <a:t>3. Move to</a:t>
-            </a:r>
-          </a:p>
-          <a:p>
-            <a:pPr algn="ctr"/>
-            <a:r>
-              <a:rPr sz="850" b="1" i="0">
-                <a:solidFill>
-                  <a:srgbClr val="111B30"/>
-                </a:solidFill>
-                <a:latin typeface="Calibri"/>
-              </a:rPr>
-              <a:t>OU=Disabled,...</a:t>
-            </a:r>
-          </a:p>
-          <a:p>
-            <a:pPr algn="ctr"/>
-            <a:r>
-              <a:rPr sz="850" b="1" i="0">
-                <a:solidFill>
-                  <a:srgbClr val="111B30"/>
-                </a:solidFill>
-                <a:latin typeface="Calibri"/>
-              </a:rPr>
-              <a:t>(create the OU</a:t>
-            </a:r>
-          </a:p>
-          <a:p>
-            <a:pPr algn="ctr"/>
-            <a:r>
-              <a:rPr sz="850" b="1" i="0">
-                <a:solidFill>
-                  <a:srgbClr val="111B30"/>
-                </a:solidFill>
-                <a:latin typeface="Calibri"/>
-              </a:rPr>
-              <a:t>first if needed)</a:t>
-            </a:r>
-          </a:p>
-        </p:txBody>
-      </p:sp>
-      <p:sp>
-        <p:nvSpPr>
-          <p:cNvPr id="7" name="Rounded Rectangle 6"/>
-          <p:cNvSpPr/>
-          <p:nvPr/>
-        </p:nvSpPr>
-        <p:spPr>
-          <a:xfrm>
-            <a:off x="8960205" y="2103120"/>
-            <a:ext cx="2286000" cy="1234440"/>
-          </a:xfrm>
-          <a:prstGeom prst="roundRect">
-            <a:avLst/>
-          </a:prstGeom>
-          <a:solidFill>
-            <a:srgbClr val="E8EEF7"/>
-          </a:solidFill>
-          <a:ln w="15875">
-            <a:solidFill>
-              <a:srgbClr val="1B2A4A"/>
-            </a:solidFill>
-          </a:ln>
-        </p:spPr>
-        <p:style>
-          <a:lnRef idx="1">
-            <a:schemeClr val="accent1"/>
-          </a:lnRef>
-          <a:fillRef idx="3">
-            <a:schemeClr val="accent1"/>
-          </a:fillRef>
-          <a:effectRef idx="2">
-            <a:schemeClr val="accent1"/>
-          </a:effectRef>
-          <a:fontRef idx="minor">
-            <a:schemeClr val="lt1"/>
-          </a:fontRef>
-        </p:style>
-        <p:txBody>
-          <a:bodyPr rtlCol="0" anchor="ctr" wrap="square" lIns="38100" rIns="38100" tIns="12700" bIns="12700"/>
-          <a:lstStyle/>
-          <a:p>
-            <a:pPr algn="ctr"/>
-            <a:r>
-              <a:rPr sz="850" b="0" i="0">
-                <a:solidFill>
-                  <a:srgbClr val="111B30"/>
-                </a:solidFill>
-                <a:latin typeface="Calibri"/>
-              </a:rPr>
-              <a:t>4. Log the action:</a:t>
-            </a:r>
-          </a:p>
-          <a:p>
-            <a:pPr algn="ctr"/>
-            <a:r>
-              <a:rPr sz="850" b="0" i="0">
-                <a:solidFill>
-                  <a:srgbClr val="111B30"/>
-                </a:solidFill>
-                <a:latin typeface="Calibri"/>
-              </a:rPr>
-              <a:t>timestamp +</a:t>
-            </a:r>
-          </a:p>
-          <a:p>
-            <a:pPr algn="ctr"/>
-            <a:r>
-              <a:rPr sz="850" b="0" i="0">
-                <a:solidFill>
-                  <a:srgbClr val="111B30"/>
-                </a:solidFill>
-                <a:latin typeface="Calibri"/>
-              </a:rPr>
-              <a:t>SamAccountName +</a:t>
-            </a:r>
-          </a:p>
-          <a:p>
-            <a:pPr algn="ctr"/>
-            <a:r>
-              <a:rPr sz="850" b="0" i="0">
-                <a:solidFill>
-                  <a:srgbClr val="111B30"/>
-                </a:solidFill>
-                <a:latin typeface="Calibri"/>
-              </a:rPr>
-              <a:t>action taken</a:t>
-            </a:r>
-          </a:p>
-        </p:txBody>
-      </p:sp>
-      <p:cxnSp>
-        <p:nvCxnSpPr>
-          <p:cNvPr id="8" name="Connector 7"/>
-          <p:cNvCxnSpPr/>
-          <p:nvPr/>
-        </p:nvCxnSpPr>
-        <p:spPr>
-          <a:xfrm>
-            <a:off x="3200400" y="2720339"/>
-            <a:ext cx="395935" cy="0"/>
-          </a:xfrm>
-          <a:prstGeom prst="line">
-            <a:avLst/>
-          </a:prstGeom>
-          <a:ln w="19050">
-            <a:solidFill>
-              <a:srgbClr val="6B7480"/>
-            </a:solidFill>
-            <a:tailEnd type="triangle" w="med" len="med"/>
-          </a:ln>
-        </p:spPr>
-        <p:style>
-          <a:lnRef idx="2">
-            <a:schemeClr val="accent1"/>
-          </a:lnRef>
-          <a:fillRef idx="0">
-            <a:schemeClr val="accent1"/>
-          </a:fillRef>
-          <a:effectRef idx="1">
-            <a:schemeClr val="accent1"/>
-          </a:effectRef>
-          <a:fontRef idx="minor">
-            <a:schemeClr val="tx1"/>
-          </a:fontRef>
-        </p:style>
-      </p:cxnSp>
-      <p:cxnSp>
-        <p:nvCxnSpPr>
-          <p:cNvPr id="9" name="Connector 8"/>
-          <p:cNvCxnSpPr/>
-          <p:nvPr/>
-        </p:nvCxnSpPr>
-        <p:spPr>
-          <a:xfrm>
-            <a:off x="5882335" y="2720339"/>
-            <a:ext cx="395935" cy="0"/>
-          </a:xfrm>
-          <a:prstGeom prst="line">
-            <a:avLst/>
-          </a:prstGeom>
-          <a:ln w="19050">
-            <a:solidFill>
-              <a:srgbClr val="6B7480"/>
-            </a:solidFill>
-            <a:tailEnd type="triangle" w="med" len="med"/>
-          </a:ln>
-        </p:spPr>
-        <p:style>
-          <a:lnRef idx="2">
-            <a:schemeClr val="accent1"/>
-          </a:lnRef>
-          <a:fillRef idx="0">
-            <a:schemeClr val="accent1"/>
-          </a:fillRef>
-          <a:effectRef idx="1">
-            <a:schemeClr val="accent1"/>
-          </a:effectRef>
-          <a:fontRef idx="minor">
-            <a:schemeClr val="tx1"/>
-          </a:fontRef>
-        </p:style>
-      </p:cxnSp>
-      <p:cxnSp>
-        <p:nvCxnSpPr>
-          <p:cNvPr id="10" name="Connector 9"/>
-          <p:cNvCxnSpPr/>
-          <p:nvPr/>
-        </p:nvCxnSpPr>
-        <p:spPr>
-          <a:xfrm>
-            <a:off x="8564270" y="2720339"/>
-            <a:ext cx="395935" cy="0"/>
-          </a:xfrm>
-          <a:prstGeom prst="line">
-            <a:avLst/>
-          </a:prstGeom>
-          <a:ln w="19050">
-            <a:solidFill>
-              <a:srgbClr val="6B7480"/>
-            </a:solidFill>
-            <a:tailEnd type="triangle" w="med" len="med"/>
-          </a:ln>
-        </p:spPr>
-        <p:style>
-          <a:lnRef idx="2">
-            <a:schemeClr val="accent1"/>
-          </a:lnRef>
-          <a:fillRef idx="0">
-            <a:schemeClr val="accent1"/>
-          </a:fillRef>
-          <a:effectRef idx="1">
-            <a:schemeClr val="accent1"/>
-          </a:effectRef>
-          <a:fontRef idx="minor">
-            <a:schemeClr val="tx1"/>
-          </a:fontRef>
-        </p:style>
-      </p:cxnSp>
-      <p:sp>
-        <p:nvSpPr>
-          <p:cNvPr id="11" name="Rounded Rectangle 10"/>
-          <p:cNvSpPr/>
-          <p:nvPr/>
-        </p:nvSpPr>
-        <p:spPr>
-          <a:xfrm>
-            <a:off x="5120640" y="3794760"/>
-            <a:ext cx="3657600" cy="914400"/>
-          </a:xfrm>
-          <a:prstGeom prst="roundRect">
-            <a:avLst/>
-          </a:prstGeom>
-          <a:solidFill>
-            <a:srgbClr val="E8EEF7"/>
-          </a:solidFill>
-          <a:ln w="15875">
-            <a:solidFill>
-              <a:srgbClr val="B02A2A"/>
-            </a:solidFill>
-          </a:ln>
-        </p:spPr>
-        <p:style>
-          <a:lnRef idx="1">
-            <a:schemeClr val="accent1"/>
-          </a:lnRef>
-          <a:fillRef idx="3">
-            <a:schemeClr val="accent1"/>
-          </a:fillRef>
-          <a:effectRef idx="2">
-            <a:schemeClr val="accent1"/>
-          </a:effectRef>
-          <a:fontRef idx="minor">
-            <a:schemeClr val="lt1"/>
-          </a:fontRef>
-        </p:style>
-        <p:txBody>
-          <a:bodyPr rtlCol="0" anchor="ctr" wrap="square" lIns="38100" rIns="38100" tIns="12700" bIns="12700"/>
-          <a:lstStyle/>
-          <a:p>
-            <a:pPr algn="ctr"/>
-            <a:r>
-              <a:rPr sz="950" b="1" i="0">
-                <a:solidFill>
-                  <a:srgbClr val="B02A2A"/>
-                </a:solidFill>
-                <a:latin typeface="Calibri"/>
-              </a:rPr>
-              <a:t>~90 days in quarantine before deletion.</a:t>
-            </a:r>
-          </a:p>
-          <a:p>
-            <a:pPr algn="ctr"/>
-            <a:r>
-              <a:rPr sz="950" b="1" i="0">
-                <a:solidFill>
-                  <a:srgbClr val="B02A2A"/>
-                </a:solidFill>
-                <a:latin typeface="Calibri"/>
-              </a:rPr>
-              <a:t>Final deletion needs sign-off from</a:t>
-            </a:r>
-          </a:p>
-          <a:p>
-            <a:pPr algn="ctr"/>
-            <a:r>
-              <a:rPr sz="950" b="1" i="0">
-                <a:solidFill>
-                  <a:srgbClr val="B02A2A"/>
-                </a:solidFill>
-                <a:latin typeface="Calibri"/>
-              </a:rPr>
-              <a:t>someone other than the sweep's admin.</a:t>
-            </a:r>
-          </a:p>
-        </p:txBody>
-      </p:sp>
-      <p:cxnSp>
-        <p:nvCxnSpPr>
-          <p:cNvPr id="12" name="Connector 11"/>
-          <p:cNvCxnSpPr/>
-          <p:nvPr/>
-        </p:nvCxnSpPr>
-        <p:spPr>
-          <a:xfrm flipH="1">
-            <a:off x="6949440" y="3337560"/>
-            <a:ext cx="471830" cy="457200"/>
-          </a:xfrm>
-          <a:prstGeom prst="line">
-            <a:avLst/>
-          </a:prstGeom>
-          <a:ln w="19050">
-            <a:solidFill>
-              <a:srgbClr val="B02A2A"/>
-            </a:solidFill>
-            <a:prstDash val="dash"/>
-            <a:tailEnd type="triangle" w="med" len="med"/>
-          </a:ln>
-        </p:spPr>
-        <p:style>
-          <a:lnRef idx="2">
-            <a:schemeClr val="accent1"/>
-          </a:lnRef>
-          <a:fillRef idx="0">
-            <a:schemeClr val="accent1"/>
-          </a:fillRef>
-          <a:effectRef idx="1">
-            <a:schemeClr val="accent1"/>
-          </a:effectRef>
-          <a:fontRef idx="minor">
-            <a:schemeClr val="tx1"/>
-          </a:fontRef>
-        </p:style>
-      </p:cxnSp>
-    </p:spTree>
-  </p:cSld>
-  <p:clrMapOvr>
-    <a:masterClrMapping/>
-  </p:clrMapOvr>
-</p:sld>
-</file>
-
 <file path=ppt/slides/slide98.xml><?xml version="1.0" encoding="utf-8"?>
 <p:sld xmlns:a="http://schemas.openxmlformats.org/drawingml/2006/main" xmlns:p="http://schemas.openxmlformats.org/presentationml/2006/main" xmlns:r="http://schemas.openxmlformats.org/officeDocument/2006/relationships">
   <p:cSld>
@@ -55761,7 +56340,7 @@
                 </a:solidFill>
                 <a:latin typeface="Cambria"/>
               </a:rPr>
-              <a:t>Human Error at Volume</a:t>
+              <a:t>Quarantine OU &amp; Staged Remediation Workflow</a:t>
             </a:r>
           </a:p>
         </p:txBody>
@@ -55791,11 +56370,11 @@
             <a:r>
               <a:rPr sz="1350" b="0" i="1">
                 <a:solidFill>
-                  <a:srgbClr val="B02A2A"/>
-                </a:solidFill>
-                <a:latin typeface="Calibri"/>
-              </a:rPr>
-              <a:t>Risk Spotlight</a:t>
+                  <a:srgbClr val="3D5A80"/>
+                </a:solidFill>
+                <a:latin typeface="Calibri"/>
+              </a:rPr>
+              <a:t>A staged manual remediation sequence for accounts a sweep flags - the same OU=Disabled quarantine previewed in Section 01.</a:t>
             </a:r>
           </a:p>
         </p:txBody>
@@ -55808,8 +56387,476 @@
         </p:nvSpPr>
         <p:spPr>
           <a:xfrm>
-            <a:off x="822960" y="2286000"/>
-            <a:ext cx="3108960" cy="1188720"/>
+            <a:off x="914400" y="2103120"/>
+            <a:ext cx="2286000" cy="1234440"/>
+          </a:xfrm>
+          <a:prstGeom prst="roundRect">
+            <a:avLst/>
+          </a:prstGeom>
+          <a:solidFill>
+            <a:srgbClr val="E8EEF7"/>
+          </a:solidFill>
+          <a:ln w="15875">
+            <a:solidFill>
+              <a:srgbClr val="1B2A4A"/>
+            </a:solidFill>
+          </a:ln>
+        </p:spPr>
+        <p:style>
+          <a:lnRef idx="1">
+            <a:schemeClr val="accent1"/>
+          </a:lnRef>
+          <a:fillRef idx="3">
+            <a:schemeClr val="accent1"/>
+          </a:fillRef>
+          <a:effectRef idx="2">
+            <a:schemeClr val="accent1"/>
+          </a:effectRef>
+          <a:fontRef idx="minor">
+            <a:schemeClr val="lt1"/>
+          </a:fontRef>
+        </p:style>
+        <p:txBody>
+          <a:bodyPr rtlCol="0" anchor="ctr" wrap="square" lIns="38100" rIns="38100" tIns="12700" bIns="12700"/>
+          <a:lstStyle/>
+          <a:p>
+            <a:pPr algn="ctr"/>
+            <a:r>
+              <a:rPr sz="850" b="0" i="0">
+                <a:solidFill>
+                  <a:srgbClr val="111B30"/>
+                </a:solidFill>
+                <a:latin typeface="Calibri"/>
+              </a:rPr>
+              <a:t>1. Disable the</a:t>
+            </a:r>
+          </a:p>
+          <a:p>
+            <a:pPr algn="ctr"/>
+            <a:r>
+              <a:rPr sz="850" b="0" i="0">
+                <a:solidFill>
+                  <a:srgbClr val="111B30"/>
+                </a:solidFill>
+                <a:latin typeface="Calibri"/>
+              </a:rPr>
+              <a:t>account</a:t>
+            </a:r>
+          </a:p>
+          <a:p>
+            <a:pPr algn="ctr"/>
+            <a:r>
+              <a:rPr sz="850" b="0" i="0">
+                <a:solidFill>
+                  <a:srgbClr val="111B30"/>
+                </a:solidFill>
+                <a:latin typeface="Calibri"/>
+              </a:rPr>
+              <a:t>(Set-ADUser</a:t>
+            </a:r>
+          </a:p>
+          <a:p>
+            <a:pPr algn="ctr"/>
+            <a:r>
+              <a:rPr sz="850" b="0" i="0">
+                <a:solidFill>
+                  <a:srgbClr val="111B30"/>
+                </a:solidFill>
+                <a:latin typeface="Calibri"/>
+              </a:rPr>
+              <a:t>-Enabled $false)</a:t>
+            </a:r>
+          </a:p>
+        </p:txBody>
+      </p:sp>
+      <p:sp>
+        <p:nvSpPr>
+          <p:cNvPr id="5" name="Rounded Rectangle 4"/>
+          <p:cNvSpPr/>
+          <p:nvPr/>
+        </p:nvSpPr>
+        <p:spPr>
+          <a:xfrm>
+            <a:off x="3596335" y="2103120"/>
+            <a:ext cx="2286000" cy="1234440"/>
+          </a:xfrm>
+          <a:prstGeom prst="roundRect">
+            <a:avLst/>
+          </a:prstGeom>
+          <a:solidFill>
+            <a:srgbClr val="E8EEF7"/>
+          </a:solidFill>
+          <a:ln w="15875">
+            <a:solidFill>
+              <a:srgbClr val="1B2A4A"/>
+            </a:solidFill>
+          </a:ln>
+        </p:spPr>
+        <p:style>
+          <a:lnRef idx="1">
+            <a:schemeClr val="accent1"/>
+          </a:lnRef>
+          <a:fillRef idx="3">
+            <a:schemeClr val="accent1"/>
+          </a:fillRef>
+          <a:effectRef idx="2">
+            <a:schemeClr val="accent1"/>
+          </a:effectRef>
+          <a:fontRef idx="minor">
+            <a:schemeClr val="lt1"/>
+          </a:fontRef>
+        </p:style>
+        <p:txBody>
+          <a:bodyPr rtlCol="0" anchor="ctr" wrap="square" lIns="38100" rIns="38100" tIns="12700" bIns="12700"/>
+          <a:lstStyle/>
+          <a:p>
+            <a:pPr algn="ctr"/>
+            <a:r>
+              <a:rPr sz="800" b="0" i="0">
+                <a:solidFill>
+                  <a:srgbClr val="111B30"/>
+                </a:solidFill>
+                <a:latin typeface="Calibri"/>
+              </a:rPr>
+              <a:t>2. Set Description:</a:t>
+            </a:r>
+          </a:p>
+          <a:p>
+            <a:pPr algn="ctr"/>
+            <a:r>
+              <a:rPr sz="800" b="0" i="0">
+                <a:solidFill>
+                  <a:srgbClr val="111B30"/>
+                </a:solidFill>
+                <a:latin typeface="Calibri"/>
+              </a:rPr>
+              <a:t>[DISABLED] Manual</a:t>
+            </a:r>
+          </a:p>
+          <a:p>
+            <a:pPr algn="ctr"/>
+            <a:r>
+              <a:rPr sz="800" b="0" i="0">
+                <a:solidFill>
+                  <a:srgbClr val="111B30"/>
+                </a:solidFill>
+                <a:latin typeface="Calibri"/>
+              </a:rPr>
+              <a:t>review - stale &gt;Nd.</a:t>
+            </a:r>
+          </a:p>
+          <a:p>
+            <a:pPr algn="ctr"/>
+            <a:r>
+              <a:rPr sz="800" b="0" i="0">
+                <a:solidFill>
+                  <a:srgbClr val="111B30"/>
+                </a:solidFill>
+                <a:latin typeface="Calibri"/>
+              </a:rPr>
+              <a:t>Disabled by/on...</a:t>
+            </a:r>
+          </a:p>
+        </p:txBody>
+      </p:sp>
+      <p:sp>
+        <p:nvSpPr>
+          <p:cNvPr id="6" name="Rounded Rectangle 5"/>
+          <p:cNvSpPr/>
+          <p:nvPr/>
+        </p:nvSpPr>
+        <p:spPr>
+          <a:xfrm>
+            <a:off x="6278270" y="2103120"/>
+            <a:ext cx="2286000" cy="1234440"/>
+          </a:xfrm>
+          <a:prstGeom prst="roundRect">
+            <a:avLst/>
+          </a:prstGeom>
+          <a:solidFill>
+            <a:srgbClr val="E8EEF7"/>
+          </a:solidFill>
+          <a:ln w="15875">
+            <a:solidFill>
+              <a:srgbClr val="00B4D8"/>
+            </a:solidFill>
+          </a:ln>
+        </p:spPr>
+        <p:style>
+          <a:lnRef idx="1">
+            <a:schemeClr val="accent1"/>
+          </a:lnRef>
+          <a:fillRef idx="3">
+            <a:schemeClr val="accent1"/>
+          </a:fillRef>
+          <a:effectRef idx="2">
+            <a:schemeClr val="accent1"/>
+          </a:effectRef>
+          <a:fontRef idx="minor">
+            <a:schemeClr val="lt1"/>
+          </a:fontRef>
+        </p:style>
+        <p:txBody>
+          <a:bodyPr rtlCol="0" anchor="ctr" wrap="square" lIns="38100" rIns="38100" tIns="12700" bIns="12700"/>
+          <a:lstStyle/>
+          <a:p>
+            <a:pPr algn="ctr"/>
+            <a:r>
+              <a:rPr sz="850" b="1" i="0">
+                <a:solidFill>
+                  <a:srgbClr val="111B30"/>
+                </a:solidFill>
+                <a:latin typeface="Calibri"/>
+              </a:rPr>
+              <a:t>3. Move to</a:t>
+            </a:r>
+          </a:p>
+          <a:p>
+            <a:pPr algn="ctr"/>
+            <a:r>
+              <a:rPr sz="850" b="1" i="0">
+                <a:solidFill>
+                  <a:srgbClr val="111B30"/>
+                </a:solidFill>
+                <a:latin typeface="Calibri"/>
+              </a:rPr>
+              <a:t>OU=Disabled,...</a:t>
+            </a:r>
+          </a:p>
+          <a:p>
+            <a:pPr algn="ctr"/>
+            <a:r>
+              <a:rPr sz="850" b="1" i="0">
+                <a:solidFill>
+                  <a:srgbClr val="111B30"/>
+                </a:solidFill>
+                <a:latin typeface="Calibri"/>
+              </a:rPr>
+              <a:t>(create the OU</a:t>
+            </a:r>
+          </a:p>
+          <a:p>
+            <a:pPr algn="ctr"/>
+            <a:r>
+              <a:rPr sz="850" b="1" i="0">
+                <a:solidFill>
+                  <a:srgbClr val="111B30"/>
+                </a:solidFill>
+                <a:latin typeface="Calibri"/>
+              </a:rPr>
+              <a:t>first if needed)</a:t>
+            </a:r>
+          </a:p>
+        </p:txBody>
+      </p:sp>
+      <p:sp>
+        <p:nvSpPr>
+          <p:cNvPr id="7" name="Rounded Rectangle 6"/>
+          <p:cNvSpPr/>
+          <p:nvPr/>
+        </p:nvSpPr>
+        <p:spPr>
+          <a:xfrm>
+            <a:off x="8960205" y="2103120"/>
+            <a:ext cx="2286000" cy="1234440"/>
+          </a:xfrm>
+          <a:prstGeom prst="roundRect">
+            <a:avLst/>
+          </a:prstGeom>
+          <a:solidFill>
+            <a:srgbClr val="E8EEF7"/>
+          </a:solidFill>
+          <a:ln w="15875">
+            <a:solidFill>
+              <a:srgbClr val="1B2A4A"/>
+            </a:solidFill>
+          </a:ln>
+        </p:spPr>
+        <p:style>
+          <a:lnRef idx="1">
+            <a:schemeClr val="accent1"/>
+          </a:lnRef>
+          <a:fillRef idx="3">
+            <a:schemeClr val="accent1"/>
+          </a:fillRef>
+          <a:effectRef idx="2">
+            <a:schemeClr val="accent1"/>
+          </a:effectRef>
+          <a:fontRef idx="minor">
+            <a:schemeClr val="lt1"/>
+          </a:fontRef>
+        </p:style>
+        <p:txBody>
+          <a:bodyPr rtlCol="0" anchor="ctr" wrap="square" lIns="38100" rIns="38100" tIns="12700" bIns="12700"/>
+          <a:lstStyle/>
+          <a:p>
+            <a:pPr algn="ctr"/>
+            <a:r>
+              <a:rPr sz="850" b="0" i="0">
+                <a:solidFill>
+                  <a:srgbClr val="111B30"/>
+                </a:solidFill>
+                <a:latin typeface="Calibri"/>
+              </a:rPr>
+              <a:t>4. Log the action:</a:t>
+            </a:r>
+          </a:p>
+          <a:p>
+            <a:pPr algn="ctr"/>
+            <a:r>
+              <a:rPr sz="850" b="0" i="0">
+                <a:solidFill>
+                  <a:srgbClr val="111B30"/>
+                </a:solidFill>
+                <a:latin typeface="Calibri"/>
+              </a:rPr>
+              <a:t>timestamp +</a:t>
+            </a:r>
+          </a:p>
+          <a:p>
+            <a:pPr algn="ctr"/>
+            <a:r>
+              <a:rPr sz="850" b="0" i="0">
+                <a:solidFill>
+                  <a:srgbClr val="111B30"/>
+                </a:solidFill>
+                <a:latin typeface="Calibri"/>
+              </a:rPr>
+              <a:t>SamAccountName +</a:t>
+            </a:r>
+          </a:p>
+          <a:p>
+            <a:pPr algn="ctr"/>
+            <a:r>
+              <a:rPr sz="850" b="0" i="0">
+                <a:solidFill>
+                  <a:srgbClr val="111B30"/>
+                </a:solidFill>
+                <a:latin typeface="Calibri"/>
+              </a:rPr>
+              <a:t>action taken</a:t>
+            </a:r>
+          </a:p>
+        </p:txBody>
+      </p:sp>
+      <p:cxnSp>
+        <p:nvCxnSpPr>
+          <p:cNvPr id="8" name="Connector 7"/>
+          <p:cNvCxnSpPr/>
+          <p:nvPr/>
+        </p:nvCxnSpPr>
+        <p:spPr>
+          <a:xfrm>
+            <a:off x="3200400" y="2720339"/>
+            <a:ext cx="395935" cy="0"/>
+          </a:xfrm>
+          <a:prstGeom prst="line">
+            <a:avLst/>
+          </a:prstGeom>
+          <a:ln w="19050">
+            <a:solidFill>
+              <a:srgbClr val="6B7480"/>
+            </a:solidFill>
+            <a:tailEnd type="triangle" w="med" len="med"/>
+          </a:ln>
+        </p:spPr>
+        <p:style>
+          <a:lnRef idx="2">
+            <a:schemeClr val="accent1"/>
+          </a:lnRef>
+          <a:fillRef idx="0">
+            <a:schemeClr val="accent1"/>
+          </a:fillRef>
+          <a:effectRef idx="1">
+            <a:schemeClr val="accent1"/>
+          </a:effectRef>
+          <a:fontRef idx="minor">
+            <a:schemeClr val="tx1"/>
+          </a:fontRef>
+        </p:style>
+      </p:cxnSp>
+      <p:cxnSp>
+        <p:nvCxnSpPr>
+          <p:cNvPr id="9" name="Connector 8"/>
+          <p:cNvCxnSpPr/>
+          <p:nvPr/>
+        </p:nvCxnSpPr>
+        <p:spPr>
+          <a:xfrm>
+            <a:off x="5882335" y="2720339"/>
+            <a:ext cx="395935" cy="0"/>
+          </a:xfrm>
+          <a:prstGeom prst="line">
+            <a:avLst/>
+          </a:prstGeom>
+          <a:ln w="19050">
+            <a:solidFill>
+              <a:srgbClr val="6B7480"/>
+            </a:solidFill>
+            <a:tailEnd type="triangle" w="med" len="med"/>
+          </a:ln>
+        </p:spPr>
+        <p:style>
+          <a:lnRef idx="2">
+            <a:schemeClr val="accent1"/>
+          </a:lnRef>
+          <a:fillRef idx="0">
+            <a:schemeClr val="accent1"/>
+          </a:fillRef>
+          <a:effectRef idx="1">
+            <a:schemeClr val="accent1"/>
+          </a:effectRef>
+          <a:fontRef idx="minor">
+            <a:schemeClr val="tx1"/>
+          </a:fontRef>
+        </p:style>
+      </p:cxnSp>
+      <p:cxnSp>
+        <p:nvCxnSpPr>
+          <p:cNvPr id="10" name="Connector 9"/>
+          <p:cNvCxnSpPr/>
+          <p:nvPr/>
+        </p:nvCxnSpPr>
+        <p:spPr>
+          <a:xfrm>
+            <a:off x="8564270" y="2720339"/>
+            <a:ext cx="395935" cy="0"/>
+          </a:xfrm>
+          <a:prstGeom prst="line">
+            <a:avLst/>
+          </a:prstGeom>
+          <a:ln w="19050">
+            <a:solidFill>
+              <a:srgbClr val="6B7480"/>
+            </a:solidFill>
+            <a:tailEnd type="triangle" w="med" len="med"/>
+          </a:ln>
+        </p:spPr>
+        <p:style>
+          <a:lnRef idx="2">
+            <a:schemeClr val="accent1"/>
+          </a:lnRef>
+          <a:fillRef idx="0">
+            <a:schemeClr val="accent1"/>
+          </a:fillRef>
+          <a:effectRef idx="1">
+            <a:schemeClr val="accent1"/>
+          </a:effectRef>
+          <a:fontRef idx="minor">
+            <a:schemeClr val="tx1"/>
+          </a:fontRef>
+        </p:style>
+      </p:cxnSp>
+      <p:sp>
+        <p:nvSpPr>
+          <p:cNvPr id="11" name="Rounded Rectangle 10"/>
+          <p:cNvSpPr/>
+          <p:nvPr/>
+        </p:nvSpPr>
+        <p:spPr>
+          <a:xfrm>
+            <a:off x="5120640" y="3794760"/>
+            <a:ext cx="3657600" cy="914400"/>
           </a:xfrm>
           <a:prstGeom prst="roundRect">
             <a:avLst/>
@@ -55843,316 +56890,58 @@
           <a:p>
             <a:pPr algn="ctr"/>
             <a:r>
-              <a:rPr sz="1100" b="0" i="0">
-                <a:solidFill>
-                  <a:srgbClr val="111B30"/>
-                </a:solidFill>
-                <a:latin typeface="Calibri"/>
-              </a:rPr>
-              <a:t>Hundreds of accounts</a:t>
-            </a:r>
-          </a:p>
-          <a:p>
-            <a:pPr algn="ctr"/>
-            <a:r>
-              <a:rPr sz="1100" b="0" i="0">
-                <a:solidFill>
-                  <a:srgbClr val="111B30"/>
-                </a:solidFill>
-                <a:latin typeface="Calibri"/>
-              </a:rPr>
-              <a:t>remediated by hand</a:t>
-            </a:r>
-          </a:p>
-        </p:txBody>
-      </p:sp>
-      <p:sp>
-        <p:nvSpPr>
-          <p:cNvPr id="5" name="Rounded Rectangle 4"/>
-          <p:cNvSpPr/>
-          <p:nvPr/>
-        </p:nvSpPr>
-        <p:spPr>
-          <a:xfrm>
-            <a:off x="4544568" y="2286000"/>
-            <a:ext cx="3108960" cy="1188720"/>
-          </a:xfrm>
-          <a:prstGeom prst="roundRect">
-            <a:avLst/>
-          </a:prstGeom>
-          <a:solidFill>
-            <a:srgbClr val="FFFFFF"/>
-          </a:solidFill>
-          <a:ln w="15875">
+              <a:rPr sz="950" b="1" i="0">
+                <a:solidFill>
+                  <a:srgbClr val="B02A2A"/>
+                </a:solidFill>
+                <a:latin typeface="Calibri"/>
+              </a:rPr>
+              <a:t>~90 days in quarantine before deletion.</a:t>
+            </a:r>
+          </a:p>
+          <a:p>
+            <a:pPr algn="ctr"/>
+            <a:r>
+              <a:rPr sz="950" b="1" i="0">
+                <a:solidFill>
+                  <a:srgbClr val="B02A2A"/>
+                </a:solidFill>
+                <a:latin typeface="Calibri"/>
+              </a:rPr>
+              <a:t>Final deletion needs sign-off from</a:t>
+            </a:r>
+          </a:p>
+          <a:p>
+            <a:pPr algn="ctr"/>
+            <a:r>
+              <a:rPr sz="950" b="1" i="0">
+                <a:solidFill>
+                  <a:srgbClr val="B02A2A"/>
+                </a:solidFill>
+                <a:latin typeface="Calibri"/>
+              </a:rPr>
+              <a:t>someone other than the sweep's admin.</a:t>
+            </a:r>
+          </a:p>
+        </p:txBody>
+      </p:sp>
+      <p:cxnSp>
+        <p:nvCxnSpPr>
+          <p:cNvPr id="12" name="Connector 11"/>
+          <p:cNvCxnSpPr/>
+          <p:nvPr/>
+        </p:nvCxnSpPr>
+        <p:spPr>
+          <a:xfrm flipH="1">
+            <a:off x="6949440" y="3337560"/>
+            <a:ext cx="471830" cy="457200"/>
+          </a:xfrm>
+          <a:prstGeom prst="line">
+            <a:avLst/>
+          </a:prstGeom>
+          <a:ln w="19050">
             <a:solidFill>
               <a:srgbClr val="B02A2A"/>
-            </a:solidFill>
-          </a:ln>
-        </p:spPr>
-        <p:style>
-          <a:lnRef idx="1">
-            <a:schemeClr val="accent1"/>
-          </a:lnRef>
-          <a:fillRef idx="3">
-            <a:schemeClr val="accent1"/>
-          </a:fillRef>
-          <a:effectRef idx="2">
-            <a:schemeClr val="accent1"/>
-          </a:effectRef>
-          <a:fontRef idx="minor">
-            <a:schemeClr val="lt1"/>
-          </a:fontRef>
-        </p:style>
-        <p:txBody>
-          <a:bodyPr rtlCol="0" anchor="ctr" wrap="square" lIns="38100" rIns="38100" tIns="12700" bIns="12700"/>
-          <a:lstStyle/>
-          <a:p>
-            <a:pPr algn="ctr"/>
-            <a:r>
-              <a:rPr sz="1100" b="1" i="0">
-                <a:solidFill>
-                  <a:srgbClr val="111B30"/>
-                </a:solidFill>
-                <a:latin typeface="Calibri"/>
-              </a:rPr>
-              <a:t>Execution is inconsistent -</a:t>
-            </a:r>
-          </a:p>
-          <a:p>
-            <a:pPr algn="ctr"/>
-            <a:r>
-              <a:rPr sz="1100" b="1" i="0">
-                <a:solidFill>
-                  <a:srgbClr val="111B30"/>
-                </a:solidFill>
-                <a:latin typeface="Calibri"/>
-              </a:rPr>
-              <a:t>missed steps, typos</a:t>
-            </a:r>
-          </a:p>
-        </p:txBody>
-      </p:sp>
-      <p:sp>
-        <p:nvSpPr>
-          <p:cNvPr id="6" name="Rounded Rectangle 5"/>
-          <p:cNvSpPr/>
-          <p:nvPr/>
-        </p:nvSpPr>
-        <p:spPr>
-          <a:xfrm>
-            <a:off x="8266175" y="2286000"/>
-            <a:ext cx="3108960" cy="1188720"/>
-          </a:xfrm>
-          <a:prstGeom prst="roundRect">
-            <a:avLst/>
-          </a:prstGeom>
-          <a:solidFill>
-            <a:srgbClr val="E8EEF7"/>
-          </a:solidFill>
-          <a:ln w="15875">
-            <a:solidFill>
-              <a:srgbClr val="B02A2A"/>
-            </a:solidFill>
-          </a:ln>
-        </p:spPr>
-        <p:style>
-          <a:lnRef idx="1">
-            <a:schemeClr val="accent1"/>
-          </a:lnRef>
-          <a:fillRef idx="3">
-            <a:schemeClr val="accent1"/>
-          </a:fillRef>
-          <a:effectRef idx="2">
-            <a:schemeClr val="accent1"/>
-          </a:effectRef>
-          <a:fontRef idx="minor">
-            <a:schemeClr val="lt1"/>
-          </a:fontRef>
-        </p:style>
-        <p:txBody>
-          <a:bodyPr rtlCol="0" anchor="ctr" wrap="square" lIns="38100" rIns="38100" tIns="12700" bIns="12700"/>
-          <a:lstStyle/>
-          <a:p>
-            <a:pPr algn="ctr"/>
-            <a:r>
-              <a:rPr sz="1100" b="0" i="0">
-                <a:solidFill>
-                  <a:srgbClr val="111B30"/>
-                </a:solidFill>
-                <a:latin typeface="Calibri"/>
-              </a:rPr>
-              <a:t>Some accounts end up</a:t>
-            </a:r>
-          </a:p>
-          <a:p>
-            <a:pPr algn="ctr"/>
-            <a:r>
-              <a:rPr sz="1100" b="0" i="0">
-                <a:solidFill>
-                  <a:srgbClr val="111B30"/>
-                </a:solidFill>
-                <a:latin typeface="Calibri"/>
-              </a:rPr>
-              <a:t>incorrectly or only</a:t>
-            </a:r>
-          </a:p>
-          <a:p>
-            <a:pPr algn="ctr"/>
-            <a:r>
-              <a:rPr sz="1100" b="0" i="0">
-                <a:solidFill>
-                  <a:srgbClr val="111B30"/>
-                </a:solidFill>
-                <a:latin typeface="Calibri"/>
-              </a:rPr>
-              <a:t>partially remediated</a:t>
-            </a:r>
-          </a:p>
-        </p:txBody>
-      </p:sp>
-      <p:cxnSp>
-        <p:nvCxnSpPr>
-          <p:cNvPr id="7" name="Connector 6"/>
-          <p:cNvCxnSpPr/>
-          <p:nvPr/>
-        </p:nvCxnSpPr>
-        <p:spPr>
-          <a:xfrm>
-            <a:off x="3931920" y="2880360"/>
-            <a:ext cx="612648" cy="0"/>
-          </a:xfrm>
-          <a:prstGeom prst="line">
-            <a:avLst/>
-          </a:prstGeom>
-          <a:ln w="25400">
-            <a:solidFill>
-              <a:srgbClr val="B02A2A"/>
-            </a:solidFill>
-            <a:tailEnd type="triangle" w="med" len="med"/>
-          </a:ln>
-        </p:spPr>
-        <p:style>
-          <a:lnRef idx="2">
-            <a:schemeClr val="accent1"/>
-          </a:lnRef>
-          <a:fillRef idx="0">
-            <a:schemeClr val="accent1"/>
-          </a:fillRef>
-          <a:effectRef idx="1">
-            <a:schemeClr val="accent1"/>
-          </a:effectRef>
-          <a:fontRef idx="minor">
-            <a:schemeClr val="tx1"/>
-          </a:fontRef>
-        </p:style>
-      </p:cxnSp>
-      <p:cxnSp>
-        <p:nvCxnSpPr>
-          <p:cNvPr id="8" name="Connector 7"/>
-          <p:cNvCxnSpPr/>
-          <p:nvPr/>
-        </p:nvCxnSpPr>
-        <p:spPr>
-          <a:xfrm>
-            <a:off x="7653527" y="2880360"/>
-            <a:ext cx="612648" cy="0"/>
-          </a:xfrm>
-          <a:prstGeom prst="line">
-            <a:avLst/>
-          </a:prstGeom>
-          <a:ln w="25400">
-            <a:solidFill>
-              <a:srgbClr val="B02A2A"/>
-            </a:solidFill>
-            <a:tailEnd type="triangle" w="med" len="med"/>
-          </a:ln>
-        </p:spPr>
-        <p:style>
-          <a:lnRef idx="2">
-            <a:schemeClr val="accent1"/>
-          </a:lnRef>
-          <a:fillRef idx="0">
-            <a:schemeClr val="accent1"/>
-          </a:fillRef>
-          <a:effectRef idx="1">
-            <a:schemeClr val="accent1"/>
-          </a:effectRef>
-          <a:fontRef idx="minor">
-            <a:schemeClr val="tx1"/>
-          </a:fontRef>
-        </p:style>
-      </p:cxnSp>
-      <p:sp>
-        <p:nvSpPr>
-          <p:cNvPr id="9" name="Rounded Rectangle 8"/>
-          <p:cNvSpPr/>
-          <p:nvPr/>
-        </p:nvSpPr>
-        <p:spPr>
-          <a:xfrm>
-            <a:off x="1737360" y="4023360"/>
-            <a:ext cx="8714232" cy="1005840"/>
-          </a:xfrm>
-          <a:prstGeom prst="roundRect">
-            <a:avLst/>
-          </a:prstGeom>
-          <a:solidFill>
-            <a:srgbClr val="E8EEF7"/>
-          </a:solidFill>
-          <a:ln w="15875">
-            <a:solidFill>
-              <a:srgbClr val="2E7D32"/>
-            </a:solidFill>
-          </a:ln>
-        </p:spPr>
-        <p:style>
-          <a:lnRef idx="1">
-            <a:schemeClr val="accent1"/>
-          </a:lnRef>
-          <a:fillRef idx="3">
-            <a:schemeClr val="accent1"/>
-          </a:fillRef>
-          <a:effectRef idx="2">
-            <a:schemeClr val="accent1"/>
-          </a:effectRef>
-          <a:fontRef idx="minor">
-            <a:schemeClr val="lt1"/>
-          </a:fontRef>
-        </p:style>
-        <p:txBody>
-          <a:bodyPr rtlCol="0" anchor="ctr" wrap="square" lIns="38100" rIns="38100" tIns="12700" bIns="12700"/>
-          <a:lstStyle/>
-          <a:p>
-            <a:pPr algn="ctr"/>
-            <a:r>
-              <a:rPr sz="1200" b="1" i="0">
-                <a:solidFill>
-                  <a:srgbClr val="2E7D32"/>
-                </a:solidFill>
-                <a:latin typeface="Calibri"/>
-              </a:rPr>
-              <a:t>MITIGATION: Ticket-per-account workflow with two-person approval</a:t>
-            </a:r>
-          </a:p>
-        </p:txBody>
-      </p:sp>
-      <p:cxnSp>
-        <p:nvCxnSpPr>
-          <p:cNvPr id="10" name="Connector 9"/>
-          <p:cNvCxnSpPr/>
-          <p:nvPr/>
-        </p:nvCxnSpPr>
-        <p:spPr>
-          <a:xfrm flipH="1">
-            <a:off x="6094475" y="3474720"/>
-            <a:ext cx="4573" cy="548640"/>
-          </a:xfrm>
-          <a:prstGeom prst="line">
-            <a:avLst/>
-          </a:prstGeom>
-          <a:ln w="19050">
-            <a:solidFill>
-              <a:srgbClr val="2E7D32"/>
             </a:solidFill>
             <a:prstDash val="dash"/>
             <a:tailEnd type="triangle" w="med" len="med"/>
@@ -56229,7 +57018,7 @@
                 </a:solidFill>
                 <a:latin typeface="Cambria"/>
               </a:rPr>
-              <a:t>No Verification Trail</a:t>
+              <a:t>Human Error at Volume</a:t>
             </a:r>
           </a:p>
         </p:txBody>
@@ -56317,7 +57106,7 @@
                 </a:solidFill>
                 <a:latin typeface="Calibri"/>
               </a:rPr>
-              <a:t>Remediation happens</a:t>
+              <a:t>Hundreds of accounts</a:t>
             </a:r>
           </a:p>
           <a:p>
@@ -56329,7 +57118,7 @@
                 </a:solidFill>
                 <a:latin typeface="Calibri"/>
               </a:rPr>
-              <a:t>without structured logging</a:t>
+              <a:t>remediated by hand</a:t>
             </a:r>
           </a:p>
         </p:txBody>
@@ -56383,7 +57172,7 @@
                 </a:solidFill>
                 <a:latin typeface="Calibri"/>
               </a:rPr>
-              <a:t>No way to confirm every</a:t>
+              <a:t>Execution is inconsistent -</a:t>
             </a:r>
           </a:p>
           <a:p>
@@ -56395,19 +57184,7 @@
                 </a:solidFill>
                 <a:latin typeface="Calibri"/>
               </a:rPr>
-              <a:t>flagged account was</a:t>
-            </a:r>
-          </a:p>
-          <a:p>
-            <a:pPr algn="ctr"/>
-            <a:r>
-              <a:rPr sz="1100" b="1" i="0">
-                <a:solidFill>
-                  <a:srgbClr val="111B30"/>
-                </a:solidFill>
-                <a:latin typeface="Calibri"/>
-              </a:rPr>
-              <a:t>actually fixed correctly</a:t>
+              <a:t>missed steps, typos</a:t>
             </a:r>
           </a:p>
         </p:txBody>
@@ -56461,7 +57238,7 @@
                 </a:solidFill>
                 <a:latin typeface="Calibri"/>
               </a:rPr>
-              <a:t>Errors go undetected until</a:t>
+              <a:t>Some accounts end up</a:t>
             </a:r>
           </a:p>
           <a:p>
@@ -56473,7 +57250,7 @@
                 </a:solidFill>
                 <a:latin typeface="Calibri"/>
               </a:rPr>
-              <a:t>something breaks or an</a:t>
+              <a:t>incorrectly or only</a:t>
             </a:r>
           </a:p>
           <a:p>
@@ -56485,7 +57262,7 @@
                 </a:solidFill>
                 <a:latin typeface="Calibri"/>
               </a:rPr>
-              <a:t>audit finds them later</a:t>
+              <a:t>partially remediated</a:t>
             </a:r>
           </a:p>
         </p:txBody>
@@ -56611,7 +57388,7 @@
                 </a:solidFill>
                 <a:latin typeface="Calibri"/>
               </a:rPr>
-              <a:t>MITIGATION: A dry-run/report mode before any account is touched, reviewed against the findings</a:t>
+              <a:t>MITIGATION: Ticket-per-account workflow with two-person approval</a:t>
             </a:r>
           </a:p>
         </p:txBody>
